--- a/vignettes/figures/fims-path-maturity.pptx
+++ b/vignettes/figures/fims-path-maturity.pptx
@@ -261,7 +261,7 @@
           <a:p>
             <a:fld id="{576C322C-E16E-4C03-B617-B5EC0115F350}" type="datetimeFigureOut">
               <a:rPr lang="en-US" smtClean="0"/>
-              <a:t>6/27/2023</a:t>
+              <a:t>12/16/2024</a:t>
             </a:fld>
             <a:endParaRPr lang="en-US"/>
           </a:p>
@@ -431,7 +431,7 @@
           <a:p>
             <a:fld id="{576C322C-E16E-4C03-B617-B5EC0115F350}" type="datetimeFigureOut">
               <a:rPr lang="en-US" smtClean="0"/>
-              <a:t>6/27/2023</a:t>
+              <a:t>12/16/2024</a:t>
             </a:fld>
             <a:endParaRPr lang="en-US"/>
           </a:p>
@@ -611,7 +611,7 @@
           <a:p>
             <a:fld id="{576C322C-E16E-4C03-B617-B5EC0115F350}" type="datetimeFigureOut">
               <a:rPr lang="en-US" smtClean="0"/>
-              <a:t>6/27/2023</a:t>
+              <a:t>12/16/2024</a:t>
             </a:fld>
             <a:endParaRPr lang="en-US"/>
           </a:p>
@@ -781,7 +781,7 @@
           <a:p>
             <a:fld id="{576C322C-E16E-4C03-B617-B5EC0115F350}" type="datetimeFigureOut">
               <a:rPr lang="en-US" smtClean="0"/>
-              <a:t>6/27/2023</a:t>
+              <a:t>12/16/2024</a:t>
             </a:fld>
             <a:endParaRPr lang="en-US"/>
           </a:p>
@@ -1027,7 +1027,7 @@
           <a:p>
             <a:fld id="{576C322C-E16E-4C03-B617-B5EC0115F350}" type="datetimeFigureOut">
               <a:rPr lang="en-US" smtClean="0"/>
-              <a:t>6/27/2023</a:t>
+              <a:t>12/16/2024</a:t>
             </a:fld>
             <a:endParaRPr lang="en-US"/>
           </a:p>
@@ -1259,7 +1259,7 @@
           <a:p>
             <a:fld id="{576C322C-E16E-4C03-B617-B5EC0115F350}" type="datetimeFigureOut">
               <a:rPr lang="en-US" smtClean="0"/>
-              <a:t>6/27/2023</a:t>
+              <a:t>12/16/2024</a:t>
             </a:fld>
             <a:endParaRPr lang="en-US"/>
           </a:p>
@@ -1626,7 +1626,7 @@
           <a:p>
             <a:fld id="{576C322C-E16E-4C03-B617-B5EC0115F350}" type="datetimeFigureOut">
               <a:rPr lang="en-US" smtClean="0"/>
-              <a:t>6/27/2023</a:t>
+              <a:t>12/16/2024</a:t>
             </a:fld>
             <a:endParaRPr lang="en-US"/>
           </a:p>
@@ -1744,7 +1744,7 @@
           <a:p>
             <a:fld id="{576C322C-E16E-4C03-B617-B5EC0115F350}" type="datetimeFigureOut">
               <a:rPr lang="en-US" smtClean="0"/>
-              <a:t>6/27/2023</a:t>
+              <a:t>12/16/2024</a:t>
             </a:fld>
             <a:endParaRPr lang="en-US"/>
           </a:p>
@@ -1839,7 +1839,7 @@
           <a:p>
             <a:fld id="{576C322C-E16E-4C03-B617-B5EC0115F350}" type="datetimeFigureOut">
               <a:rPr lang="en-US" smtClean="0"/>
-              <a:t>6/27/2023</a:t>
+              <a:t>12/16/2024</a:t>
             </a:fld>
             <a:endParaRPr lang="en-US"/>
           </a:p>
@@ -2116,7 +2116,7 @@
           <a:p>
             <a:fld id="{576C322C-E16E-4C03-B617-B5EC0115F350}" type="datetimeFigureOut">
               <a:rPr lang="en-US" smtClean="0"/>
-              <a:t>6/27/2023</a:t>
+              <a:t>12/16/2024</a:t>
             </a:fld>
             <a:endParaRPr lang="en-US"/>
           </a:p>
@@ -2369,7 +2369,7 @@
           <a:p>
             <a:fld id="{576C322C-E16E-4C03-B617-B5EC0115F350}" type="datetimeFigureOut">
               <a:rPr lang="en-US" smtClean="0"/>
-              <a:t>6/27/2023</a:t>
+              <a:t>12/16/2024</a:t>
             </a:fld>
             <a:endParaRPr lang="en-US"/>
           </a:p>
@@ -2582,7 +2582,7 @@
           <a:p>
             <a:fld id="{576C322C-E16E-4C03-B617-B5EC0115F350}" type="datetimeFigureOut">
               <a:rPr lang="en-US" smtClean="0"/>
-              <a:t>6/27/2023</a:t>
+              <a:t>12/16/2024</a:t>
             </a:fld>
             <a:endParaRPr lang="en-US"/>
           </a:p>
@@ -3003,113 +3003,6 @@
         </p:grpSpPr>
         <p:sp>
           <p:nvSpPr>
-            <p:cNvPr id="4" name="Rectangle 3"/>
-            <p:cNvSpPr/>
-            <p:nvPr/>
-          </p:nvSpPr>
-          <p:spPr>
-            <a:xfrm>
-              <a:off x="245917" y="723900"/>
-              <a:ext cx="1619250" cy="1028700"/>
-            </a:xfrm>
-            <a:prstGeom prst="rect">
-              <a:avLst/>
-            </a:prstGeom>
-            <a:solidFill>
-              <a:schemeClr val="accent1">
-                <a:lumMod val="20000"/>
-                <a:lumOff val="80000"/>
-              </a:schemeClr>
-            </a:solidFill>
-            <a:ln>
-              <a:solidFill>
-                <a:schemeClr val="accent1">
-                  <a:lumMod val="50000"/>
-                </a:schemeClr>
-              </a:solidFill>
-            </a:ln>
-          </p:spPr>
-          <p:style>
-            <a:lnRef idx="2">
-              <a:schemeClr val="accent1">
-                <a:shade val="50000"/>
-              </a:schemeClr>
-            </a:lnRef>
-            <a:fillRef idx="1">
-              <a:schemeClr val="accent1"/>
-            </a:fillRef>
-            <a:effectRef idx="0">
-              <a:schemeClr val="accent1"/>
-            </a:effectRef>
-            <a:fontRef idx="minor">
-              <a:schemeClr val="lt1"/>
-            </a:fontRef>
-          </p:style>
-          <p:txBody>
-            <a:bodyPr rtlCol="0" anchor="ctr"/>
-            <a:lstStyle/>
-            <a:p>
-              <a:r>
-                <a:rPr lang="en-US" b="1" dirty="0" err="1" smtClean="0">
-                  <a:solidFill>
-                    <a:schemeClr val="accent1">
-                      <a:lumMod val="50000"/>
-                    </a:schemeClr>
-                  </a:solidFill>
-                </a:rPr>
-                <a:t>fims$maturity</a:t>
-              </a:r>
-              <a:endParaRPr lang="en-US" b="1" dirty="0" smtClean="0">
-                <a:solidFill>
-                  <a:schemeClr val="accent1">
-                    <a:lumMod val="50000"/>
-                  </a:schemeClr>
-                </a:solidFill>
-              </a:endParaRPr>
-            </a:p>
-            <a:p>
-              <a:pPr marL="285750" indent="-285750">
-                <a:buFont typeface="Arial" panose="020B0604020202020204" pitchFamily="34" charset="0"/>
-                <a:buChar char="•"/>
-              </a:pPr>
-              <a:r>
-                <a:rPr lang="en-US" dirty="0" smtClean="0">
-                  <a:solidFill>
-                    <a:schemeClr val="accent1">
-                      <a:lumMod val="50000"/>
-                    </a:schemeClr>
-                  </a:solidFill>
-                </a:rPr>
-                <a:t>median</a:t>
-              </a:r>
-            </a:p>
-            <a:p>
-              <a:pPr marL="285750" indent="-285750">
-                <a:buFont typeface="Arial" panose="020B0604020202020204" pitchFamily="34" charset="0"/>
-                <a:buChar char="•"/>
-              </a:pPr>
-              <a:r>
-                <a:rPr lang="en-US" dirty="0" smtClean="0">
-                  <a:solidFill>
-                    <a:schemeClr val="accent1">
-                      <a:lumMod val="50000"/>
-                    </a:schemeClr>
-                  </a:solidFill>
-                </a:rPr>
-                <a:t>slope</a:t>
-              </a:r>
-              <a:endParaRPr lang="en-US" dirty="0">
-                <a:solidFill>
-                  <a:schemeClr val="accent1">
-                    <a:lumMod val="50000"/>
-                  </a:schemeClr>
-                </a:solidFill>
-              </a:endParaRPr>
-            </a:p>
-          </p:txBody>
-        </p:sp>
-        <p:sp>
-          <p:nvSpPr>
             <p:cNvPr id="6" name="Rectangle 5"/>
             <p:cNvSpPr/>
             <p:nvPr/>
@@ -3164,7 +3057,7 @@
                     </a:schemeClr>
                   </a:solidFill>
                 </a:rPr>
-                <a:t>fims$LogisticMaturity</a:t>
+                <a:t>LogisticMaturity</a:t>
               </a:r>
               <a:endParaRPr lang="en-US" b="1" dirty="0" smtClean="0">
                 <a:solidFill>
@@ -3322,84 +3215,6 @@
                 </a:rPr>
                 <a:t>slope</a:t>
               </a:r>
-            </a:p>
-          </p:txBody>
-        </p:sp>
-        <p:cxnSp>
-          <p:nvCxnSpPr>
-            <p:cNvPr id="12" name="Straight Arrow Connector 11"/>
-            <p:cNvCxnSpPr>
-              <a:stCxn id="4" idx="3"/>
-              <a:endCxn id="6" idx="1"/>
-            </p:cNvCxnSpPr>
-            <p:nvPr/>
-          </p:nvCxnSpPr>
-          <p:spPr>
-            <a:xfrm>
-              <a:off x="1865167" y="1238250"/>
-              <a:ext cx="796385" cy="0"/>
-            </a:xfrm>
-            <a:prstGeom prst="straightConnector1">
-              <a:avLst/>
-            </a:prstGeom>
-            <a:ln w="15875">
-              <a:tailEnd type="triangle"/>
-            </a:ln>
-          </p:spPr>
-          <p:style>
-            <a:lnRef idx="1">
-              <a:schemeClr val="accent1"/>
-            </a:lnRef>
-            <a:fillRef idx="0">
-              <a:schemeClr val="accent1"/>
-            </a:fillRef>
-            <a:effectRef idx="0">
-              <a:schemeClr val="accent1"/>
-            </a:effectRef>
-            <a:fontRef idx="minor">
-              <a:schemeClr val="tx1"/>
-            </a:fontRef>
-          </p:style>
-        </p:cxnSp>
-        <p:sp>
-          <p:nvSpPr>
-            <p:cNvPr id="15" name="TextBox 14"/>
-            <p:cNvSpPr txBox="1"/>
-            <p:nvPr/>
-          </p:nvSpPr>
-          <p:spPr>
-            <a:xfrm>
-              <a:off x="1865167" y="876300"/>
-              <a:ext cx="781050" cy="369332"/>
-            </a:xfrm>
-            <a:prstGeom prst="rect">
-              <a:avLst/>
-            </a:prstGeom>
-            <a:noFill/>
-          </p:spPr>
-          <p:txBody>
-            <a:bodyPr wrap="square" rtlCol="0">
-              <a:spAutoFit/>
-            </a:bodyPr>
-            <a:lstStyle/>
-            <a:p>
-              <a:r>
-                <a:rPr lang="en-US" dirty="0" smtClean="0">
-                  <a:solidFill>
-                    <a:schemeClr val="accent1">
-                      <a:lumMod val="50000"/>
-                    </a:schemeClr>
-                  </a:solidFill>
-                </a:rPr>
-                <a:t>new()</a:t>
-              </a:r>
-              <a:endParaRPr lang="en-US" dirty="0">
-                <a:solidFill>
-                  <a:schemeClr val="accent1">
-                    <a:lumMod val="50000"/>
-                  </a:schemeClr>
-                </a:solidFill>
-              </a:endParaRPr>
             </a:p>
           </p:txBody>
         </p:sp>
@@ -3707,6 +3522,210 @@
           </p:txBody>
         </p:sp>
       </p:grpSp>
+      <p:sp>
+        <p:nvSpPr>
+          <p:cNvPr id="38" name="Rectangle 37"/>
+          <p:cNvSpPr/>
+          <p:nvPr/>
+        </p:nvSpPr>
+        <p:spPr>
+          <a:xfrm>
+            <a:off x="245917" y="723900"/>
+            <a:ext cx="1220045" cy="1028700"/>
+          </a:xfrm>
+          <a:prstGeom prst="rect">
+            <a:avLst/>
+          </a:prstGeom>
+          <a:solidFill>
+            <a:schemeClr val="accent1">
+              <a:lumMod val="20000"/>
+              <a:lumOff val="80000"/>
+            </a:schemeClr>
+          </a:solidFill>
+          <a:ln>
+            <a:solidFill>
+              <a:schemeClr val="accent1">
+                <a:lumMod val="50000"/>
+              </a:schemeClr>
+            </a:solidFill>
+          </a:ln>
+        </p:spPr>
+        <p:style>
+          <a:lnRef idx="2">
+            <a:schemeClr val="accent1">
+              <a:shade val="50000"/>
+            </a:schemeClr>
+          </a:lnRef>
+          <a:fillRef idx="1">
+            <a:schemeClr val="accent1"/>
+          </a:fillRef>
+          <a:effectRef idx="0">
+            <a:schemeClr val="accent1"/>
+          </a:effectRef>
+          <a:fontRef idx="minor">
+            <a:schemeClr val="lt1"/>
+          </a:fontRef>
+        </p:style>
+        <p:txBody>
+          <a:bodyPr rtlCol="0" anchor="ctr"/>
+          <a:lstStyle/>
+          <a:p>
+            <a:r>
+              <a:rPr lang="en-US" b="1" dirty="0" smtClean="0">
+                <a:solidFill>
+                  <a:schemeClr val="accent1">
+                    <a:lumMod val="50000"/>
+                  </a:schemeClr>
+                </a:solidFill>
+              </a:rPr>
+              <a:t>maturity</a:t>
+            </a:r>
+            <a:endParaRPr lang="en-US" b="1" dirty="0" smtClean="0">
+              <a:solidFill>
+                <a:schemeClr val="accent1">
+                  <a:lumMod val="50000"/>
+                </a:schemeClr>
+              </a:solidFill>
+            </a:endParaRPr>
+          </a:p>
+          <a:p>
+            <a:pPr marL="285750" indent="-285750">
+              <a:buFont typeface="Arial" panose="020B0604020202020204" pitchFamily="34" charset="0"/>
+              <a:buChar char="•"/>
+            </a:pPr>
+            <a:r>
+              <a:rPr lang="en-US" dirty="0" smtClean="0">
+                <a:solidFill>
+                  <a:schemeClr val="accent1">
+                    <a:lumMod val="50000"/>
+                  </a:schemeClr>
+                </a:solidFill>
+              </a:rPr>
+              <a:t>median</a:t>
+            </a:r>
+          </a:p>
+          <a:p>
+            <a:pPr marL="285750" indent="-285750">
+              <a:buFont typeface="Arial" panose="020B0604020202020204" pitchFamily="34" charset="0"/>
+              <a:buChar char="•"/>
+            </a:pPr>
+            <a:r>
+              <a:rPr lang="en-US" dirty="0" smtClean="0">
+                <a:solidFill>
+                  <a:schemeClr val="accent1">
+                    <a:lumMod val="50000"/>
+                  </a:schemeClr>
+                </a:solidFill>
+              </a:rPr>
+              <a:t>slope</a:t>
+            </a:r>
+            <a:endParaRPr lang="en-US" dirty="0">
+              <a:solidFill>
+                <a:schemeClr val="accent1">
+                  <a:lumMod val="50000"/>
+                </a:schemeClr>
+              </a:solidFill>
+            </a:endParaRPr>
+          </a:p>
+        </p:txBody>
+      </p:sp>
+      <p:cxnSp>
+        <p:nvCxnSpPr>
+          <p:cNvPr id="39" name="Straight Arrow Connector 38"/>
+          <p:cNvCxnSpPr>
+            <a:stCxn id="38" idx="3"/>
+          </p:cNvCxnSpPr>
+          <p:nvPr/>
+        </p:nvCxnSpPr>
+        <p:spPr>
+          <a:xfrm>
+            <a:off x="1465962" y="1238250"/>
+            <a:ext cx="1195589" cy="0"/>
+          </a:xfrm>
+          <a:prstGeom prst="straightConnector1">
+            <a:avLst/>
+          </a:prstGeom>
+          <a:ln w="15875">
+            <a:tailEnd type="triangle"/>
+          </a:ln>
+        </p:spPr>
+        <p:style>
+          <a:lnRef idx="1">
+            <a:schemeClr val="accent1"/>
+          </a:lnRef>
+          <a:fillRef idx="0">
+            <a:schemeClr val="accent1"/>
+          </a:fillRef>
+          <a:effectRef idx="0">
+            <a:schemeClr val="accent1"/>
+          </a:effectRef>
+          <a:fontRef idx="minor">
+            <a:schemeClr val="tx1"/>
+          </a:fontRef>
+        </p:style>
+      </p:cxnSp>
+      <p:sp>
+        <p:nvSpPr>
+          <p:cNvPr id="40" name="TextBox 39"/>
+          <p:cNvSpPr txBox="1"/>
+          <p:nvPr/>
+        </p:nvSpPr>
+        <p:spPr>
+          <a:xfrm>
+            <a:off x="1405580" y="944268"/>
+            <a:ext cx="1443753" cy="307777"/>
+          </a:xfrm>
+          <a:prstGeom prst="rect">
+            <a:avLst/>
+          </a:prstGeom>
+          <a:noFill/>
+        </p:spPr>
+        <p:txBody>
+          <a:bodyPr wrap="square" rtlCol="0">
+            <a:spAutoFit/>
+          </a:bodyPr>
+          <a:lstStyle/>
+          <a:p>
+            <a:r>
+              <a:rPr lang="en-US" sz="1400" dirty="0">
+                <a:solidFill>
+                  <a:schemeClr val="accent1">
+                    <a:lumMod val="50000"/>
+                  </a:schemeClr>
+                </a:solidFill>
+              </a:rPr>
+              <a:t>m</a:t>
+            </a:r>
+            <a:r>
+              <a:rPr lang="en-US" sz="1400" dirty="0" smtClean="0">
+                <a:solidFill>
+                  <a:schemeClr val="accent1">
+                    <a:lumMod val="50000"/>
+                  </a:schemeClr>
+                </a:solidFill>
+              </a:rPr>
+              <a:t>ethods::new</a:t>
+            </a:r>
+            <a:r>
+              <a:rPr lang="en-US" sz="1400" dirty="0" smtClean="0">
+                <a:solidFill>
+                  <a:schemeClr val="accent1">
+                    <a:lumMod val="50000"/>
+                  </a:schemeClr>
+                </a:solidFill>
+              </a:rPr>
+              <a:t>()</a:t>
+            </a:r>
+            <a:endParaRPr lang="en-US" sz="1400" dirty="0">
+              <a:solidFill>
+                <a:schemeClr val="accent1">
+                  <a:lumMod val="50000"/>
+                </a:schemeClr>
+              </a:solidFill>
+            </a:endParaRPr>
+          </a:p>
+        </p:txBody>
+      </p:sp>
     </p:spTree>
     <p:extLst>
       <p:ext uri="{BB962C8B-B14F-4D97-AF65-F5344CB8AC3E}">
@@ -3760,7 +3779,7 @@
           <p:spPr>
             <a:xfrm>
               <a:off x="245917" y="723900"/>
-              <a:ext cx="1619250" cy="1028700"/>
+              <a:ext cx="1220045" cy="1028700"/>
             </a:xfrm>
             <a:prstGeom prst="rect">
               <a:avLst/>
@@ -3800,14 +3819,14 @@
             <a:lstStyle/>
             <a:p>
               <a:r>
-                <a:rPr lang="en-US" b="1" dirty="0" err="1" smtClean="0">
+                <a:rPr lang="en-US" b="1" dirty="0" smtClean="0">
                   <a:solidFill>
                     <a:schemeClr val="accent1">
                       <a:lumMod val="50000"/>
                     </a:schemeClr>
                   </a:solidFill>
                 </a:rPr>
-                <a:t>fims$maturity</a:t>
+                <a:t>maturity</a:t>
               </a:r>
               <a:endParaRPr lang="en-US" b="1" dirty="0" smtClean="0">
                 <a:solidFill>
@@ -3914,7 +3933,7 @@
                     </a:schemeClr>
                   </a:solidFill>
                 </a:rPr>
-                <a:t>fims$LogisticMaturity</a:t>
+                <a:t>LogisticMaturity</a:t>
               </a:r>
               <a:endParaRPr lang="en-US" b="1" dirty="0" smtClean="0">
                 <a:solidFill>
@@ -4108,10 +4127,17 @@
                 </a:rPr>
                 <a:t>(</a:t>
               </a:r>
-            </a:p>
-            <a:p>
-              <a:r>
-                <a:rPr lang="en-US" dirty="0">
+              <a:endParaRPr lang="en-US" sz="1400" dirty="0" smtClean="0">
+                <a:solidFill>
+                  <a:schemeClr val="accent2">
+                    <a:lumMod val="75000"/>
+                  </a:schemeClr>
+                </a:solidFill>
+              </a:endParaRPr>
+            </a:p>
+            <a:p>
+              <a:r>
+                <a:rPr lang="en-US" sz="1400" dirty="0">
                   <a:solidFill>
                     <a:schemeClr val="accent2">
                       <a:lumMod val="75000"/>
@@ -4121,46 +4147,93 @@
                 <a:t> </a:t>
               </a:r>
               <a:r>
-                <a:rPr lang="en-US" dirty="0" smtClean="0">
+                <a:rPr lang="en-US" sz="1400" dirty="0" smtClean="0">
                   <a:solidFill>
                     <a:schemeClr val="accent2">
                       <a:lumMod val="75000"/>
                     </a:schemeClr>
                   </a:solidFill>
                 </a:rPr>
-                <a:t>       shared pointer: lm0</a:t>
-              </a:r>
-            </a:p>
-            <a:p>
-              <a:r>
-                <a:rPr lang="en-US" dirty="0">
+                <a:t>       shared pointer: </a:t>
+              </a:r>
+              <a:r>
+                <a:rPr lang="en-US" sz="1400" dirty="0" smtClean="0">
                   <a:solidFill>
                     <a:schemeClr val="accent2">
                       <a:lumMod val="75000"/>
                     </a:schemeClr>
                   </a:solidFill>
                 </a:rPr>
-                <a:t> </a:t>
-              </a:r>
-              <a:r>
-                <a:rPr lang="en-US" dirty="0" smtClean="0">
+                <a:t>maturity</a:t>
+              </a:r>
+              <a:endParaRPr lang="en-US" sz="1400" dirty="0" smtClean="0">
+                <a:solidFill>
+                  <a:schemeClr val="accent2">
+                    <a:lumMod val="75000"/>
+                  </a:schemeClr>
+                </a:solidFill>
+              </a:endParaRPr>
+            </a:p>
+            <a:p>
+              <a:r>
+                <a:rPr lang="en-US" sz="1400" dirty="0">
                   <a:solidFill>
                     <a:schemeClr val="accent2">
                       <a:lumMod val="75000"/>
                     </a:schemeClr>
                   </a:solidFill>
                 </a:rPr>
-                <a:t>       shared pointer: </a:t>
-              </a:r>
-              <a:r>
-                <a:rPr lang="en-US" dirty="0" smtClean="0">
+                <a:t> </a:t>
+              </a:r>
+              <a:r>
+                <a:rPr lang="en-US" sz="1400" dirty="0" smtClean="0">
                   <a:solidFill>
                     <a:schemeClr val="accent2">
                       <a:lumMod val="75000"/>
                     </a:schemeClr>
                   </a:solidFill>
                 </a:rPr>
-                <a:t>d0)</a:t>
+                <a:t>       </a:t>
+              </a:r>
+              <a:r>
+                <a:rPr lang="en-US" sz="1400" dirty="0" smtClean="0">
+                  <a:solidFill>
+                    <a:schemeClr val="accent2">
+                      <a:lumMod val="75000"/>
+                    </a:schemeClr>
+                  </a:solidFill>
+                </a:rPr>
+                <a:t>shared </a:t>
+              </a:r>
+              <a:r>
+                <a:rPr lang="en-US" sz="1400" dirty="0" smtClean="0">
+                  <a:solidFill>
+                    <a:schemeClr val="accent2">
+                      <a:lumMod val="75000"/>
+                    </a:schemeClr>
+                  </a:solidFill>
+                </a:rPr>
+                <a:t>pointer: </a:t>
+              </a:r>
+              <a:r>
+                <a:rPr lang="en-US" sz="1400" dirty="0" smtClean="0">
+                  <a:solidFill>
+                    <a:schemeClr val="accent2">
+                      <a:lumMod val="75000"/>
+                    </a:schemeClr>
+                  </a:solidFill>
+                </a:rPr>
+                <a:t>info</a:t>
+              </a:r>
+              <a:r>
+                <a:rPr lang="en-US" dirty="0" smtClean="0">
+                  <a:solidFill>
+                    <a:schemeClr val="accent2">
+                      <a:lumMod val="75000"/>
+                    </a:schemeClr>
+                  </a:solidFill>
+                </a:rPr>
+                <a:t>)</a:t>
               </a:r>
               <a:endParaRPr lang="en-US" dirty="0" smtClean="0">
                 <a:solidFill>
@@ -4183,8 +4256,8 @@
           </p:nvCxnSpPr>
           <p:spPr>
             <a:xfrm>
-              <a:off x="1865167" y="1238250"/>
-              <a:ext cx="796385" cy="0"/>
+              <a:off x="1465962" y="1238250"/>
+              <a:ext cx="1195589" cy="0"/>
             </a:xfrm>
             <a:prstGeom prst="straightConnector1">
               <a:avLst/>
@@ -4216,8 +4289,8 @@
           </p:nvSpPr>
           <p:spPr>
             <a:xfrm>
-              <a:off x="1865167" y="876300"/>
-              <a:ext cx="781050" cy="369332"/>
+              <a:off x="1405580" y="944268"/>
+              <a:ext cx="1443753" cy="307777"/>
             </a:xfrm>
             <a:prstGeom prst="rect">
               <a:avLst/>
@@ -4231,16 +4304,36 @@
             <a:lstStyle/>
             <a:p>
               <a:r>
-                <a:rPr lang="en-US" dirty="0" smtClean="0">
+                <a:rPr lang="en-US" sz="1400" dirty="0">
                   <a:solidFill>
                     <a:schemeClr val="accent1">
                       <a:lumMod val="50000"/>
                     </a:schemeClr>
                   </a:solidFill>
                 </a:rPr>
-                <a:t>new()</a:t>
-              </a:r>
-              <a:endParaRPr lang="en-US" dirty="0">
+                <a:t>m</a:t>
+              </a:r>
+              <a:r>
+                <a:rPr lang="en-US" sz="1400" dirty="0" smtClean="0">
+                  <a:solidFill>
+                    <a:schemeClr val="accent1">
+                      <a:lumMod val="50000"/>
+                    </a:schemeClr>
+                  </a:solidFill>
+                </a:rPr>
+                <a:t>ethods::new</a:t>
+              </a:r>
+              <a:r>
+                <a:rPr lang="en-US" sz="1400" dirty="0" smtClean="0">
+                  <a:solidFill>
+                    <a:schemeClr val="accent1">
+                      <a:lumMod val="50000"/>
+                    </a:schemeClr>
+                  </a:solidFill>
+                </a:rPr>
+                <a:t>()</a:t>
+              </a:r>
+              <a:endParaRPr lang="en-US" sz="1400" dirty="0">
                 <a:solidFill>
                   <a:schemeClr val="accent1">
                     <a:lumMod val="50000"/>
@@ -4493,8 +4586,8 @@
           </p:nvSpPr>
           <p:spPr>
             <a:xfrm>
-              <a:off x="315545" y="3583279"/>
-              <a:ext cx="2133600" cy="369332"/>
+              <a:off x="630323" y="3471935"/>
+              <a:ext cx="1792926" cy="646331"/>
             </a:xfrm>
             <a:prstGeom prst="rect">
               <a:avLst/>
@@ -4515,8 +4608,25 @@
                     </a:schemeClr>
                   </a:solidFill>
                 </a:rPr>
-                <a:t>shared pointer: lm0</a:t>
-              </a:r>
+                <a:t>shared pointer: </a:t>
+              </a:r>
+              <a:r>
+                <a:rPr lang="en-US" dirty="0" smtClean="0">
+                  <a:solidFill>
+                    <a:schemeClr val="accent2">
+                      <a:lumMod val="75000"/>
+                    </a:schemeClr>
+                  </a:solidFill>
+                </a:rPr>
+                <a:t>maturity</a:t>
+              </a:r>
+              <a:endParaRPr lang="en-US" dirty="0" smtClean="0">
+                <a:solidFill>
+                  <a:schemeClr val="accent2">
+                    <a:lumMod val="75000"/>
+                  </a:schemeClr>
+                </a:solidFill>
+              </a:endParaRPr>
             </a:p>
           </p:txBody>
         </p:sp>
@@ -4750,8 +4860,15 @@
                     </a:schemeClr>
                   </a:solidFill>
                 </a:rPr>
-                <a:t>d0</a:t>
-              </a:r>
+                <a:t>info</a:t>
+              </a:r>
+              <a:endParaRPr lang="en-US" dirty="0" smtClean="0">
+                <a:solidFill>
+                  <a:schemeClr val="accent2">
+                    <a:lumMod val="75000"/>
+                  </a:schemeClr>
+                </a:solidFill>
+              </a:endParaRPr>
             </a:p>
           </p:txBody>
         </p:sp>
@@ -4851,11 +4968,7 @@
               </a:r>
               <a:r>
                 <a:rPr lang="en-US" dirty="0" smtClean="0"/>
-                <a:t>::</a:t>
-              </a:r>
-              <a:r>
-                <a:rPr lang="en-US" dirty="0" smtClean="0"/>
-                <a:t>Information </a:t>
+                <a:t>::Information </a:t>
               </a:r>
               <a:endParaRPr lang="en-US" dirty="0"/>
             </a:p>
@@ -5119,113 +5232,6 @@
         </p:grpSpPr>
         <p:sp>
           <p:nvSpPr>
-            <p:cNvPr id="4" name="Rectangle 3"/>
-            <p:cNvSpPr/>
-            <p:nvPr/>
-          </p:nvSpPr>
-          <p:spPr>
-            <a:xfrm>
-              <a:off x="245917" y="723900"/>
-              <a:ext cx="1619250" cy="1028700"/>
-            </a:xfrm>
-            <a:prstGeom prst="rect">
-              <a:avLst/>
-            </a:prstGeom>
-            <a:solidFill>
-              <a:schemeClr val="accent1">
-                <a:lumMod val="20000"/>
-                <a:lumOff val="80000"/>
-              </a:schemeClr>
-            </a:solidFill>
-            <a:ln>
-              <a:solidFill>
-                <a:schemeClr val="accent1">
-                  <a:lumMod val="50000"/>
-                </a:schemeClr>
-              </a:solidFill>
-            </a:ln>
-          </p:spPr>
-          <p:style>
-            <a:lnRef idx="2">
-              <a:schemeClr val="accent1">
-                <a:shade val="50000"/>
-              </a:schemeClr>
-            </a:lnRef>
-            <a:fillRef idx="1">
-              <a:schemeClr val="accent1"/>
-            </a:fillRef>
-            <a:effectRef idx="0">
-              <a:schemeClr val="accent1"/>
-            </a:effectRef>
-            <a:fontRef idx="minor">
-              <a:schemeClr val="lt1"/>
-            </a:fontRef>
-          </p:style>
-          <p:txBody>
-            <a:bodyPr rtlCol="0" anchor="ctr"/>
-            <a:lstStyle/>
-            <a:p>
-              <a:r>
-                <a:rPr lang="en-US" b="1" dirty="0" err="1" smtClean="0">
-                  <a:solidFill>
-                    <a:schemeClr val="accent1">
-                      <a:lumMod val="50000"/>
-                    </a:schemeClr>
-                  </a:solidFill>
-                </a:rPr>
-                <a:t>fims$maturity</a:t>
-              </a:r>
-              <a:endParaRPr lang="en-US" b="1" dirty="0" smtClean="0">
-                <a:solidFill>
-                  <a:schemeClr val="accent1">
-                    <a:lumMod val="50000"/>
-                  </a:schemeClr>
-                </a:solidFill>
-              </a:endParaRPr>
-            </a:p>
-            <a:p>
-              <a:pPr marL="285750" indent="-285750">
-                <a:buFont typeface="Arial" panose="020B0604020202020204" pitchFamily="34" charset="0"/>
-                <a:buChar char="•"/>
-              </a:pPr>
-              <a:r>
-                <a:rPr lang="en-US" dirty="0" smtClean="0">
-                  <a:solidFill>
-                    <a:schemeClr val="accent1">
-                      <a:lumMod val="50000"/>
-                    </a:schemeClr>
-                  </a:solidFill>
-                </a:rPr>
-                <a:t>median</a:t>
-              </a:r>
-            </a:p>
-            <a:p>
-              <a:pPr marL="285750" indent="-285750">
-                <a:buFont typeface="Arial" panose="020B0604020202020204" pitchFamily="34" charset="0"/>
-                <a:buChar char="•"/>
-              </a:pPr>
-              <a:r>
-                <a:rPr lang="en-US" dirty="0" smtClean="0">
-                  <a:solidFill>
-                    <a:schemeClr val="accent1">
-                      <a:lumMod val="50000"/>
-                    </a:schemeClr>
-                  </a:solidFill>
-                </a:rPr>
-                <a:t>slope</a:t>
-              </a:r>
-              <a:endParaRPr lang="en-US" dirty="0">
-                <a:solidFill>
-                  <a:schemeClr val="accent1">
-                    <a:lumMod val="50000"/>
-                  </a:schemeClr>
-                </a:solidFill>
-              </a:endParaRPr>
-            </a:p>
-          </p:txBody>
-        </p:sp>
-        <p:sp>
-          <p:nvSpPr>
             <p:cNvPr id="6" name="Rectangle 5"/>
             <p:cNvSpPr/>
             <p:nvPr/>
@@ -5280,7 +5286,7 @@
                     </a:schemeClr>
                   </a:solidFill>
                 </a:rPr>
-                <a:t>fims$LogisticMaturity</a:t>
+                <a:t>LogisticMaturity</a:t>
               </a:r>
               <a:endParaRPr lang="en-US" b="1" dirty="0" smtClean="0">
                 <a:solidFill>
@@ -5321,298 +5327,6 @@
                 </a:rPr>
                 <a:t>slope</a:t>
               </a:r>
-            </a:p>
-          </p:txBody>
-        </p:sp>
-        <p:sp>
-          <p:nvSpPr>
-            <p:cNvPr id="10" name="Rectangle 9"/>
-            <p:cNvSpPr/>
-            <p:nvPr/>
-          </p:nvSpPr>
-          <p:spPr>
-            <a:xfrm>
-              <a:off x="2656160" y="1752599"/>
-              <a:ext cx="2612029" cy="1853045"/>
-            </a:xfrm>
-            <a:prstGeom prst="rect">
-              <a:avLst/>
-            </a:prstGeom>
-            <a:solidFill>
-              <a:schemeClr val="accent2">
-                <a:lumMod val="20000"/>
-                <a:lumOff val="80000"/>
-              </a:schemeClr>
-            </a:solidFill>
-            <a:ln>
-              <a:solidFill>
-                <a:schemeClr val="accent2">
-                  <a:lumMod val="50000"/>
-                </a:schemeClr>
-              </a:solidFill>
-            </a:ln>
-          </p:spPr>
-          <p:style>
-            <a:lnRef idx="2">
-              <a:schemeClr val="accent1">
-                <a:shade val="50000"/>
-              </a:schemeClr>
-            </a:lnRef>
-            <a:fillRef idx="1">
-              <a:schemeClr val="accent1"/>
-            </a:fillRef>
-            <a:effectRef idx="0">
-              <a:schemeClr val="accent1"/>
-            </a:effectRef>
-            <a:fontRef idx="minor">
-              <a:schemeClr val="lt1"/>
-            </a:fontRef>
-          </p:style>
-          <p:txBody>
-            <a:bodyPr rtlCol="0" anchor="ctr"/>
-            <a:lstStyle/>
-            <a:p>
-              <a:r>
-                <a:rPr lang="en-US" sz="1200" dirty="0" smtClean="0">
-                  <a:solidFill>
-                    <a:schemeClr val="accent2">
-                      <a:lumMod val="75000"/>
-                    </a:schemeClr>
-                  </a:solidFill>
-                </a:rPr>
-                <a:t>rcpp_maturity.hpp</a:t>
-              </a:r>
-              <a:endParaRPr lang="en-US" sz="1200" dirty="0" smtClean="0">
-                <a:solidFill>
-                  <a:schemeClr val="tx1"/>
-                </a:solidFill>
-              </a:endParaRPr>
-            </a:p>
-            <a:p>
-              <a:r>
-                <a:rPr lang="en-US" b="1" dirty="0" err="1" smtClean="0">
-                  <a:solidFill>
-                    <a:schemeClr val="accent2">
-                      <a:lumMod val="75000"/>
-                    </a:schemeClr>
-                  </a:solidFill>
-                </a:rPr>
-                <a:t>LogisticMaturityInterface</a:t>
-              </a:r>
-              <a:endParaRPr lang="en-US" b="1" dirty="0" smtClean="0">
-                <a:solidFill>
-                  <a:schemeClr val="accent2">
-                    <a:lumMod val="75000"/>
-                  </a:schemeClr>
-                </a:solidFill>
-              </a:endParaRPr>
-            </a:p>
-            <a:p>
-              <a:pPr marL="285750" indent="-285750">
-                <a:buFont typeface="Arial" panose="020B0604020202020204" pitchFamily="34" charset="0"/>
-                <a:buChar char="•"/>
-              </a:pPr>
-              <a:r>
-                <a:rPr lang="en-US" dirty="0" smtClean="0">
-                  <a:solidFill>
-                    <a:schemeClr val="accent2">
-                      <a:lumMod val="75000"/>
-                    </a:schemeClr>
-                  </a:solidFill>
-                </a:rPr>
-                <a:t>median</a:t>
-              </a:r>
-            </a:p>
-            <a:p>
-              <a:pPr marL="285750" indent="-285750">
-                <a:buFont typeface="Arial" panose="020B0604020202020204" pitchFamily="34" charset="0"/>
-                <a:buChar char="•"/>
-              </a:pPr>
-              <a:r>
-                <a:rPr lang="en-US" dirty="0" smtClean="0">
-                  <a:solidFill>
-                    <a:schemeClr val="accent2">
-                      <a:lumMod val="75000"/>
-                    </a:schemeClr>
-                  </a:solidFill>
-                </a:rPr>
-                <a:t>slope</a:t>
-              </a:r>
-            </a:p>
-            <a:p>
-              <a:pPr marL="285750" indent="-285750">
-                <a:buFont typeface="Arial" panose="020B0604020202020204" pitchFamily="34" charset="0"/>
-                <a:buChar char="•"/>
-              </a:pPr>
-              <a:r>
-                <a:rPr lang="en-US" dirty="0" err="1">
-                  <a:solidFill>
-                    <a:schemeClr val="accent2">
-                      <a:lumMod val="75000"/>
-                    </a:schemeClr>
-                  </a:solidFill>
-                </a:rPr>
-                <a:t>a</a:t>
-              </a:r>
-              <a:r>
-                <a:rPr lang="en-US" dirty="0" err="1" smtClean="0">
-                  <a:solidFill>
-                    <a:schemeClr val="accent2">
-                      <a:lumMod val="75000"/>
-                    </a:schemeClr>
-                  </a:solidFill>
-                </a:rPr>
-                <a:t>dd_to_fims_tmb</a:t>
-              </a:r>
-              <a:r>
-                <a:rPr lang="en-US" dirty="0" smtClean="0">
-                  <a:solidFill>
-                    <a:schemeClr val="accent2">
-                      <a:lumMod val="75000"/>
-                    </a:schemeClr>
-                  </a:solidFill>
-                </a:rPr>
-                <a:t>(</a:t>
-              </a:r>
-            </a:p>
-            <a:p>
-              <a:r>
-                <a:rPr lang="en-US" dirty="0">
-                  <a:solidFill>
-                    <a:schemeClr val="accent2">
-                      <a:lumMod val="75000"/>
-                    </a:schemeClr>
-                  </a:solidFill>
-                </a:rPr>
-                <a:t> </a:t>
-              </a:r>
-              <a:r>
-                <a:rPr lang="en-US" dirty="0" smtClean="0">
-                  <a:solidFill>
-                    <a:schemeClr val="accent2">
-                      <a:lumMod val="75000"/>
-                    </a:schemeClr>
-                  </a:solidFill>
-                </a:rPr>
-                <a:t>       shared pointer: lm0</a:t>
-              </a:r>
-            </a:p>
-            <a:p>
-              <a:r>
-                <a:rPr lang="en-US" dirty="0">
-                  <a:solidFill>
-                    <a:schemeClr val="accent2">
-                      <a:lumMod val="75000"/>
-                    </a:schemeClr>
-                  </a:solidFill>
-                </a:rPr>
-                <a:t> </a:t>
-              </a:r>
-              <a:r>
-                <a:rPr lang="en-US" dirty="0" smtClean="0">
-                  <a:solidFill>
-                    <a:schemeClr val="accent2">
-                      <a:lumMod val="75000"/>
-                    </a:schemeClr>
-                  </a:solidFill>
-                </a:rPr>
-                <a:t>       shared pointer: </a:t>
-              </a:r>
-              <a:r>
-                <a:rPr lang="en-US" dirty="0" smtClean="0">
-                  <a:solidFill>
-                    <a:schemeClr val="accent2">
-                      <a:lumMod val="75000"/>
-                    </a:schemeClr>
-                  </a:solidFill>
-                </a:rPr>
-                <a:t>d0)</a:t>
-              </a:r>
-              <a:endParaRPr lang="en-US" dirty="0" smtClean="0">
-                <a:solidFill>
-                  <a:schemeClr val="accent2">
-                    <a:lumMod val="75000"/>
-                  </a:schemeClr>
-                </a:solidFill>
-              </a:endParaRPr>
-            </a:p>
-          </p:txBody>
-        </p:sp>
-        <p:cxnSp>
-          <p:nvCxnSpPr>
-            <p:cNvPr id="12" name="Straight Arrow Connector 11"/>
-            <p:cNvCxnSpPr>
-              <a:stCxn id="4" idx="3"/>
-              <a:endCxn id="6" idx="1"/>
-            </p:cNvCxnSpPr>
-            <p:nvPr/>
-          </p:nvCxnSpPr>
-          <p:spPr>
-            <a:xfrm>
-              <a:off x="1865167" y="1238250"/>
-              <a:ext cx="796385" cy="0"/>
-            </a:xfrm>
-            <a:prstGeom prst="straightConnector1">
-              <a:avLst/>
-            </a:prstGeom>
-            <a:ln w="15875">
-              <a:tailEnd type="triangle"/>
-            </a:ln>
-          </p:spPr>
-          <p:style>
-            <a:lnRef idx="1">
-              <a:schemeClr val="accent1"/>
-            </a:lnRef>
-            <a:fillRef idx="0">
-              <a:schemeClr val="accent1"/>
-            </a:fillRef>
-            <a:effectRef idx="0">
-              <a:schemeClr val="accent1"/>
-            </a:effectRef>
-            <a:fontRef idx="minor">
-              <a:schemeClr val="tx1"/>
-            </a:fontRef>
-          </p:style>
-        </p:cxnSp>
-        <p:sp>
-          <p:nvSpPr>
-            <p:cNvPr id="15" name="TextBox 14"/>
-            <p:cNvSpPr txBox="1"/>
-            <p:nvPr/>
-          </p:nvSpPr>
-          <p:spPr>
-            <a:xfrm>
-              <a:off x="1865167" y="876300"/>
-              <a:ext cx="781050" cy="369332"/>
-            </a:xfrm>
-            <a:prstGeom prst="rect">
-              <a:avLst/>
-            </a:prstGeom>
-            <a:noFill/>
-          </p:spPr>
-          <p:txBody>
-            <a:bodyPr wrap="square" rtlCol="0">
-              <a:spAutoFit/>
-            </a:bodyPr>
-            <a:lstStyle/>
-            <a:p>
-              <a:r>
-                <a:rPr lang="en-US" dirty="0" smtClean="0">
-                  <a:solidFill>
-                    <a:schemeClr val="accent1">
-                      <a:lumMod val="50000"/>
-                    </a:schemeClr>
-                  </a:solidFill>
-                </a:rPr>
-                <a:t>new()</a:t>
-              </a:r>
-              <a:endParaRPr lang="en-US" dirty="0">
-                <a:solidFill>
-                  <a:schemeClr val="accent1">
-                    <a:lumMod val="50000"/>
-                  </a:schemeClr>
-                </a:solidFill>
-              </a:endParaRPr>
             </a:p>
           </p:txBody>
         </p:sp>
@@ -5863,41 +5577,6 @@
                   </a:solidFill>
                 </a:rPr>
                 <a:t>evaluate(x)</a:t>
-              </a:r>
-            </a:p>
-          </p:txBody>
-        </p:sp>
-        <p:sp>
-          <p:nvSpPr>
-            <p:cNvPr id="24" name="TextBox 23"/>
-            <p:cNvSpPr txBox="1"/>
-            <p:nvPr/>
-          </p:nvSpPr>
-          <p:spPr>
-            <a:xfrm>
-              <a:off x="315545" y="3583279"/>
-              <a:ext cx="2133600" cy="369332"/>
-            </a:xfrm>
-            <a:prstGeom prst="rect">
-              <a:avLst/>
-            </a:prstGeom>
-            <a:noFill/>
-          </p:spPr>
-          <p:txBody>
-            <a:bodyPr wrap="square" rtlCol="0">
-              <a:spAutoFit/>
-            </a:bodyPr>
-            <a:lstStyle/>
-            <a:p>
-              <a:r>
-                <a:rPr lang="en-US" dirty="0" smtClean="0">
-                  <a:solidFill>
-                    <a:schemeClr val="accent2">
-                      <a:lumMod val="75000"/>
-                    </a:schemeClr>
-                  </a:solidFill>
-                </a:rPr>
-                <a:t>shared pointer: lm0</a:t>
               </a:r>
             </a:p>
           </p:txBody>
@@ -6102,8 +5781,15 @@
                     </a:schemeClr>
                   </a:solidFill>
                 </a:rPr>
-                <a:t>d0</a:t>
-              </a:r>
+                <a:t>info</a:t>
+              </a:r>
+              <a:endParaRPr lang="en-US" dirty="0" smtClean="0">
+                <a:solidFill>
+                  <a:schemeClr val="accent2">
+                    <a:lumMod val="75000"/>
+                  </a:schemeClr>
+                </a:solidFill>
+              </a:endParaRPr>
             </a:p>
           </p:txBody>
         </p:sp>
@@ -6203,11 +5889,7 @@
               </a:r>
               <a:r>
                 <a:rPr lang="en-US" dirty="0" smtClean="0"/>
-                <a:t>::</a:t>
-              </a:r>
-              <a:r>
-                <a:rPr lang="en-US" dirty="0" smtClean="0"/>
-                <a:t>Information </a:t>
+                <a:t>::Information </a:t>
               </a:r>
               <a:endParaRPr lang="en-US" dirty="0"/>
             </a:p>
@@ -6454,7 +6136,478 @@
             </a:p>
           </p:txBody>
         </p:sp>
+        <p:sp>
+          <p:nvSpPr>
+            <p:cNvPr id="10" name="Rectangle 9"/>
+            <p:cNvSpPr/>
+            <p:nvPr/>
+          </p:nvSpPr>
+          <p:spPr>
+            <a:xfrm>
+              <a:off x="2656160" y="1752599"/>
+              <a:ext cx="2612029" cy="1853045"/>
+            </a:xfrm>
+            <a:prstGeom prst="rect">
+              <a:avLst/>
+            </a:prstGeom>
+            <a:solidFill>
+              <a:schemeClr val="accent2">
+                <a:lumMod val="20000"/>
+                <a:lumOff val="80000"/>
+              </a:schemeClr>
+            </a:solidFill>
+            <a:ln>
+              <a:solidFill>
+                <a:schemeClr val="accent2">
+                  <a:lumMod val="50000"/>
+                </a:schemeClr>
+              </a:solidFill>
+            </a:ln>
+          </p:spPr>
+          <p:style>
+            <a:lnRef idx="2">
+              <a:schemeClr val="accent1">
+                <a:shade val="50000"/>
+              </a:schemeClr>
+            </a:lnRef>
+            <a:fillRef idx="1">
+              <a:schemeClr val="accent1"/>
+            </a:fillRef>
+            <a:effectRef idx="0">
+              <a:schemeClr val="accent1"/>
+            </a:effectRef>
+            <a:fontRef idx="minor">
+              <a:schemeClr val="lt1"/>
+            </a:fontRef>
+          </p:style>
+          <p:txBody>
+            <a:bodyPr rtlCol="0" anchor="ctr"/>
+            <a:lstStyle/>
+            <a:p>
+              <a:endParaRPr lang="en-US" sz="900" dirty="0" smtClean="0">
+                <a:solidFill>
+                  <a:schemeClr val="accent2">
+                    <a:lumMod val="75000"/>
+                  </a:schemeClr>
+                </a:solidFill>
+              </a:endParaRPr>
+            </a:p>
+            <a:p>
+              <a:endParaRPr lang="en-US" sz="900" dirty="0">
+                <a:solidFill>
+                  <a:schemeClr val="accent2">
+                    <a:lumMod val="75000"/>
+                  </a:schemeClr>
+                </a:solidFill>
+              </a:endParaRPr>
+            </a:p>
+            <a:p>
+              <a:r>
+                <a:rPr lang="en-US" sz="1200" dirty="0" smtClean="0">
+                  <a:solidFill>
+                    <a:schemeClr val="accent2">
+                      <a:lumMod val="75000"/>
+                    </a:schemeClr>
+                  </a:solidFill>
+                </a:rPr>
+                <a:t>rcpp_maturity.hpp</a:t>
+              </a:r>
+              <a:endParaRPr lang="en-US" sz="1200" dirty="0" smtClean="0">
+                <a:solidFill>
+                  <a:schemeClr val="tx1"/>
+                </a:solidFill>
+              </a:endParaRPr>
+            </a:p>
+            <a:p>
+              <a:r>
+                <a:rPr lang="en-US" b="1" dirty="0" err="1" smtClean="0">
+                  <a:solidFill>
+                    <a:schemeClr val="accent2">
+                      <a:lumMod val="75000"/>
+                    </a:schemeClr>
+                  </a:solidFill>
+                </a:rPr>
+                <a:t>LogisticMaturityInterface</a:t>
+              </a:r>
+              <a:endParaRPr lang="en-US" b="1" dirty="0" smtClean="0">
+                <a:solidFill>
+                  <a:schemeClr val="accent2">
+                    <a:lumMod val="75000"/>
+                  </a:schemeClr>
+                </a:solidFill>
+              </a:endParaRPr>
+            </a:p>
+            <a:p>
+              <a:pPr marL="285750" indent="-285750">
+                <a:buFont typeface="Arial" panose="020B0604020202020204" pitchFamily="34" charset="0"/>
+                <a:buChar char="•"/>
+              </a:pPr>
+              <a:r>
+                <a:rPr lang="en-US" dirty="0" smtClean="0">
+                  <a:solidFill>
+                    <a:schemeClr val="accent2">
+                      <a:lumMod val="75000"/>
+                    </a:schemeClr>
+                  </a:solidFill>
+                </a:rPr>
+                <a:t>median</a:t>
+              </a:r>
+            </a:p>
+            <a:p>
+              <a:pPr marL="285750" indent="-285750">
+                <a:buFont typeface="Arial" panose="020B0604020202020204" pitchFamily="34" charset="0"/>
+                <a:buChar char="•"/>
+              </a:pPr>
+              <a:r>
+                <a:rPr lang="en-US" dirty="0" smtClean="0">
+                  <a:solidFill>
+                    <a:schemeClr val="accent2">
+                      <a:lumMod val="75000"/>
+                    </a:schemeClr>
+                  </a:solidFill>
+                </a:rPr>
+                <a:t>slope</a:t>
+              </a:r>
+            </a:p>
+            <a:p>
+              <a:pPr marL="285750" indent="-285750">
+                <a:buFont typeface="Arial" panose="020B0604020202020204" pitchFamily="34" charset="0"/>
+                <a:buChar char="•"/>
+              </a:pPr>
+              <a:r>
+                <a:rPr lang="en-US" dirty="0" err="1" smtClean="0">
+                  <a:solidFill>
+                    <a:schemeClr val="accent2">
+                      <a:lumMod val="75000"/>
+                    </a:schemeClr>
+                  </a:solidFill>
+                </a:rPr>
+                <a:t>add_to_fims_tmb</a:t>
+              </a:r>
+              <a:r>
+                <a:rPr lang="en-US" dirty="0" smtClean="0">
+                  <a:solidFill>
+                    <a:schemeClr val="accent2">
+                      <a:lumMod val="75000"/>
+                    </a:schemeClr>
+                  </a:solidFill>
+                </a:rPr>
+                <a:t>(</a:t>
+              </a:r>
+              <a:endParaRPr lang="en-US" sz="1400" dirty="0" smtClean="0">
+                <a:solidFill>
+                  <a:schemeClr val="accent2">
+                    <a:lumMod val="75000"/>
+                  </a:schemeClr>
+                </a:solidFill>
+              </a:endParaRPr>
+            </a:p>
+            <a:p>
+              <a:r>
+                <a:rPr lang="en-US" sz="1400" dirty="0" smtClean="0">
+                  <a:solidFill>
+                    <a:schemeClr val="accent2">
+                      <a:lumMod val="75000"/>
+                    </a:schemeClr>
+                  </a:solidFill>
+                </a:rPr>
+                <a:t>        shared pointer: maturity</a:t>
+              </a:r>
+            </a:p>
+            <a:p>
+              <a:r>
+                <a:rPr lang="en-US" sz="1400" dirty="0" smtClean="0">
+                  <a:solidFill>
+                    <a:schemeClr val="accent2">
+                      <a:lumMod val="75000"/>
+                    </a:schemeClr>
+                  </a:solidFill>
+                </a:rPr>
+                <a:t>        shared pointer: info</a:t>
+              </a:r>
+              <a:r>
+                <a:rPr lang="en-US" dirty="0" smtClean="0">
+                  <a:solidFill>
+                    <a:schemeClr val="accent2">
+                      <a:lumMod val="75000"/>
+                    </a:schemeClr>
+                  </a:solidFill>
+                </a:rPr>
+                <a:t>)</a:t>
+              </a:r>
+            </a:p>
+            <a:p>
+              <a:pPr marL="285750" indent="-285750">
+                <a:buFont typeface="Arial" panose="020B0604020202020204" pitchFamily="34" charset="0"/>
+                <a:buChar char="•"/>
+              </a:pPr>
+              <a:endParaRPr lang="en-US" dirty="0" smtClean="0">
+                <a:solidFill>
+                  <a:schemeClr val="accent2">
+                    <a:lumMod val="75000"/>
+                  </a:schemeClr>
+                </a:solidFill>
+              </a:endParaRPr>
+            </a:p>
+          </p:txBody>
+        </p:sp>
       </p:grpSp>
+      <p:sp>
+        <p:nvSpPr>
+          <p:cNvPr id="23" name="TextBox 22"/>
+          <p:cNvSpPr txBox="1"/>
+          <p:nvPr/>
+        </p:nvSpPr>
+        <p:spPr>
+          <a:xfrm>
+            <a:off x="630323" y="3471935"/>
+            <a:ext cx="1792926" cy="646331"/>
+          </a:xfrm>
+          <a:prstGeom prst="rect">
+            <a:avLst/>
+          </a:prstGeom>
+          <a:noFill/>
+        </p:spPr>
+        <p:txBody>
+          <a:bodyPr wrap="square" rtlCol="0">
+            <a:spAutoFit/>
+          </a:bodyPr>
+          <a:lstStyle/>
+          <a:p>
+            <a:r>
+              <a:rPr lang="en-US" dirty="0" smtClean="0">
+                <a:solidFill>
+                  <a:schemeClr val="accent2">
+                    <a:lumMod val="75000"/>
+                  </a:schemeClr>
+                </a:solidFill>
+              </a:rPr>
+              <a:t>shared pointer: </a:t>
+            </a:r>
+            <a:r>
+              <a:rPr lang="en-US" dirty="0" smtClean="0">
+                <a:solidFill>
+                  <a:schemeClr val="accent2">
+                    <a:lumMod val="75000"/>
+                  </a:schemeClr>
+                </a:solidFill>
+              </a:rPr>
+              <a:t>maturity</a:t>
+            </a:r>
+            <a:endParaRPr lang="en-US" dirty="0" smtClean="0">
+              <a:solidFill>
+                <a:schemeClr val="accent2">
+                  <a:lumMod val="75000"/>
+                </a:schemeClr>
+              </a:solidFill>
+            </a:endParaRPr>
+          </a:p>
+        </p:txBody>
+      </p:sp>
+      <p:sp>
+        <p:nvSpPr>
+          <p:cNvPr id="27" name="Rectangle 26"/>
+          <p:cNvSpPr/>
+          <p:nvPr/>
+        </p:nvSpPr>
+        <p:spPr>
+          <a:xfrm>
+            <a:off x="245917" y="723900"/>
+            <a:ext cx="1220045" cy="1028700"/>
+          </a:xfrm>
+          <a:prstGeom prst="rect">
+            <a:avLst/>
+          </a:prstGeom>
+          <a:solidFill>
+            <a:schemeClr val="accent1">
+              <a:lumMod val="20000"/>
+              <a:lumOff val="80000"/>
+            </a:schemeClr>
+          </a:solidFill>
+          <a:ln>
+            <a:solidFill>
+              <a:schemeClr val="accent1">
+                <a:lumMod val="50000"/>
+              </a:schemeClr>
+            </a:solidFill>
+          </a:ln>
+        </p:spPr>
+        <p:style>
+          <a:lnRef idx="2">
+            <a:schemeClr val="accent1">
+              <a:shade val="50000"/>
+            </a:schemeClr>
+          </a:lnRef>
+          <a:fillRef idx="1">
+            <a:schemeClr val="accent1"/>
+          </a:fillRef>
+          <a:effectRef idx="0">
+            <a:schemeClr val="accent1"/>
+          </a:effectRef>
+          <a:fontRef idx="minor">
+            <a:schemeClr val="lt1"/>
+          </a:fontRef>
+        </p:style>
+        <p:txBody>
+          <a:bodyPr rtlCol="0" anchor="ctr"/>
+          <a:lstStyle/>
+          <a:p>
+            <a:r>
+              <a:rPr lang="en-US" b="1" dirty="0" smtClean="0">
+                <a:solidFill>
+                  <a:schemeClr val="accent1">
+                    <a:lumMod val="50000"/>
+                  </a:schemeClr>
+                </a:solidFill>
+              </a:rPr>
+              <a:t>maturity</a:t>
+            </a:r>
+            <a:endParaRPr lang="en-US" b="1" dirty="0" smtClean="0">
+              <a:solidFill>
+                <a:schemeClr val="accent1">
+                  <a:lumMod val="50000"/>
+                </a:schemeClr>
+              </a:solidFill>
+            </a:endParaRPr>
+          </a:p>
+          <a:p>
+            <a:pPr marL="285750" indent="-285750">
+              <a:buFont typeface="Arial" panose="020B0604020202020204" pitchFamily="34" charset="0"/>
+              <a:buChar char="•"/>
+            </a:pPr>
+            <a:r>
+              <a:rPr lang="en-US" dirty="0" smtClean="0">
+                <a:solidFill>
+                  <a:schemeClr val="accent1">
+                    <a:lumMod val="50000"/>
+                  </a:schemeClr>
+                </a:solidFill>
+              </a:rPr>
+              <a:t>median</a:t>
+            </a:r>
+          </a:p>
+          <a:p>
+            <a:pPr marL="285750" indent="-285750">
+              <a:buFont typeface="Arial" panose="020B0604020202020204" pitchFamily="34" charset="0"/>
+              <a:buChar char="•"/>
+            </a:pPr>
+            <a:r>
+              <a:rPr lang="en-US" dirty="0" smtClean="0">
+                <a:solidFill>
+                  <a:schemeClr val="accent1">
+                    <a:lumMod val="50000"/>
+                  </a:schemeClr>
+                </a:solidFill>
+              </a:rPr>
+              <a:t>slope</a:t>
+            </a:r>
+            <a:endParaRPr lang="en-US" dirty="0">
+              <a:solidFill>
+                <a:schemeClr val="accent1">
+                  <a:lumMod val="50000"/>
+                </a:schemeClr>
+              </a:solidFill>
+            </a:endParaRPr>
+          </a:p>
+        </p:txBody>
+      </p:sp>
+      <p:cxnSp>
+        <p:nvCxnSpPr>
+          <p:cNvPr id="28" name="Straight Arrow Connector 27"/>
+          <p:cNvCxnSpPr>
+            <a:stCxn id="27" idx="3"/>
+          </p:cNvCxnSpPr>
+          <p:nvPr/>
+        </p:nvCxnSpPr>
+        <p:spPr>
+          <a:xfrm>
+            <a:off x="1465962" y="1238250"/>
+            <a:ext cx="1195589" cy="0"/>
+          </a:xfrm>
+          <a:prstGeom prst="straightConnector1">
+            <a:avLst/>
+          </a:prstGeom>
+          <a:ln w="15875">
+            <a:tailEnd type="triangle"/>
+          </a:ln>
+        </p:spPr>
+        <p:style>
+          <a:lnRef idx="1">
+            <a:schemeClr val="accent1"/>
+          </a:lnRef>
+          <a:fillRef idx="0">
+            <a:schemeClr val="accent1"/>
+          </a:fillRef>
+          <a:effectRef idx="0">
+            <a:schemeClr val="accent1"/>
+          </a:effectRef>
+          <a:fontRef idx="minor">
+            <a:schemeClr val="tx1"/>
+          </a:fontRef>
+        </p:style>
+      </p:cxnSp>
+      <p:sp>
+        <p:nvSpPr>
+          <p:cNvPr id="29" name="TextBox 28"/>
+          <p:cNvSpPr txBox="1"/>
+          <p:nvPr/>
+        </p:nvSpPr>
+        <p:spPr>
+          <a:xfrm>
+            <a:off x="1405580" y="944268"/>
+            <a:ext cx="1443753" cy="307777"/>
+          </a:xfrm>
+          <a:prstGeom prst="rect">
+            <a:avLst/>
+          </a:prstGeom>
+          <a:noFill/>
+        </p:spPr>
+        <p:txBody>
+          <a:bodyPr wrap="square" rtlCol="0">
+            <a:spAutoFit/>
+          </a:bodyPr>
+          <a:lstStyle/>
+          <a:p>
+            <a:r>
+              <a:rPr lang="en-US" sz="1400" dirty="0">
+                <a:solidFill>
+                  <a:schemeClr val="accent1">
+                    <a:lumMod val="50000"/>
+                  </a:schemeClr>
+                </a:solidFill>
+              </a:rPr>
+              <a:t>m</a:t>
+            </a:r>
+            <a:r>
+              <a:rPr lang="en-US" sz="1400" dirty="0" smtClean="0">
+                <a:solidFill>
+                  <a:schemeClr val="accent1">
+                    <a:lumMod val="50000"/>
+                  </a:schemeClr>
+                </a:solidFill>
+              </a:rPr>
+              <a:t>ethods::new</a:t>
+            </a:r>
+            <a:r>
+              <a:rPr lang="en-US" sz="1400" dirty="0" smtClean="0">
+                <a:solidFill>
+                  <a:schemeClr val="accent1">
+                    <a:lumMod val="50000"/>
+                  </a:schemeClr>
+                </a:solidFill>
+              </a:rPr>
+              <a:t>()</a:t>
+            </a:r>
+            <a:endParaRPr lang="en-US" sz="1400" dirty="0">
+              <a:solidFill>
+                <a:schemeClr val="accent1">
+                  <a:lumMod val="50000"/>
+                </a:schemeClr>
+              </a:solidFill>
+            </a:endParaRPr>
+          </a:p>
+        </p:txBody>
+      </p:sp>
     </p:spTree>
     <p:extLst>
       <p:ext uri="{BB962C8B-B14F-4D97-AF65-F5344CB8AC3E}">
@@ -6501,113 +6654,6 @@
         </p:grpSpPr>
         <p:sp>
           <p:nvSpPr>
-            <p:cNvPr id="4" name="Rectangle 3"/>
-            <p:cNvSpPr/>
-            <p:nvPr/>
-          </p:nvSpPr>
-          <p:spPr>
-            <a:xfrm>
-              <a:off x="245917" y="723900"/>
-              <a:ext cx="1619250" cy="1028700"/>
-            </a:xfrm>
-            <a:prstGeom prst="rect">
-              <a:avLst/>
-            </a:prstGeom>
-            <a:solidFill>
-              <a:schemeClr val="accent1">
-                <a:lumMod val="20000"/>
-                <a:lumOff val="80000"/>
-              </a:schemeClr>
-            </a:solidFill>
-            <a:ln>
-              <a:solidFill>
-                <a:schemeClr val="accent1">
-                  <a:lumMod val="50000"/>
-                </a:schemeClr>
-              </a:solidFill>
-            </a:ln>
-          </p:spPr>
-          <p:style>
-            <a:lnRef idx="2">
-              <a:schemeClr val="accent1">
-                <a:shade val="50000"/>
-              </a:schemeClr>
-            </a:lnRef>
-            <a:fillRef idx="1">
-              <a:schemeClr val="accent1"/>
-            </a:fillRef>
-            <a:effectRef idx="0">
-              <a:schemeClr val="accent1"/>
-            </a:effectRef>
-            <a:fontRef idx="minor">
-              <a:schemeClr val="lt1"/>
-            </a:fontRef>
-          </p:style>
-          <p:txBody>
-            <a:bodyPr rtlCol="0" anchor="ctr"/>
-            <a:lstStyle/>
-            <a:p>
-              <a:r>
-                <a:rPr lang="en-US" b="1" dirty="0" err="1" smtClean="0">
-                  <a:solidFill>
-                    <a:schemeClr val="accent1">
-                      <a:lumMod val="50000"/>
-                    </a:schemeClr>
-                  </a:solidFill>
-                </a:rPr>
-                <a:t>fims$maturity</a:t>
-              </a:r>
-              <a:endParaRPr lang="en-US" b="1" dirty="0" smtClean="0">
-                <a:solidFill>
-                  <a:schemeClr val="accent1">
-                    <a:lumMod val="50000"/>
-                  </a:schemeClr>
-                </a:solidFill>
-              </a:endParaRPr>
-            </a:p>
-            <a:p>
-              <a:pPr marL="285750" indent="-285750">
-                <a:buFont typeface="Arial" panose="020B0604020202020204" pitchFamily="34" charset="0"/>
-                <a:buChar char="•"/>
-              </a:pPr>
-              <a:r>
-                <a:rPr lang="en-US" dirty="0" smtClean="0">
-                  <a:solidFill>
-                    <a:schemeClr val="accent1">
-                      <a:lumMod val="50000"/>
-                    </a:schemeClr>
-                  </a:solidFill>
-                </a:rPr>
-                <a:t>median</a:t>
-              </a:r>
-            </a:p>
-            <a:p>
-              <a:pPr marL="285750" indent="-285750">
-                <a:buFont typeface="Arial" panose="020B0604020202020204" pitchFamily="34" charset="0"/>
-                <a:buChar char="•"/>
-              </a:pPr>
-              <a:r>
-                <a:rPr lang="en-US" dirty="0" smtClean="0">
-                  <a:solidFill>
-                    <a:schemeClr val="accent1">
-                      <a:lumMod val="50000"/>
-                    </a:schemeClr>
-                  </a:solidFill>
-                </a:rPr>
-                <a:t>slope</a:t>
-              </a:r>
-              <a:endParaRPr lang="en-US" dirty="0">
-                <a:solidFill>
-                  <a:schemeClr val="accent1">
-                    <a:lumMod val="50000"/>
-                  </a:schemeClr>
-                </a:solidFill>
-              </a:endParaRPr>
-            </a:p>
-          </p:txBody>
-        </p:sp>
-        <p:sp>
-          <p:nvSpPr>
             <p:cNvPr id="6" name="Rectangle 5"/>
             <p:cNvSpPr/>
             <p:nvPr/>
@@ -6662,7 +6708,7 @@
                     </a:schemeClr>
                   </a:solidFill>
                 </a:rPr>
-                <a:t>fims$LogisticMaturity</a:t>
+                <a:t>LogisticMaturity</a:t>
               </a:r>
               <a:endParaRPr lang="en-US" b="1" dirty="0" smtClean="0">
                 <a:solidFill>
@@ -6856,10 +6902,17 @@
                 </a:rPr>
                 <a:t>(</a:t>
               </a:r>
-            </a:p>
-            <a:p>
-              <a:r>
-                <a:rPr lang="en-US" dirty="0">
+              <a:endParaRPr lang="en-US" sz="1400" dirty="0" smtClean="0">
+                <a:solidFill>
+                  <a:schemeClr val="accent2">
+                    <a:lumMod val="75000"/>
+                  </a:schemeClr>
+                </a:solidFill>
+              </a:endParaRPr>
+            </a:p>
+            <a:p>
+              <a:r>
+                <a:rPr lang="en-US" sz="1400" dirty="0">
                   <a:solidFill>
                     <a:schemeClr val="accent2">
                       <a:lumMod val="75000"/>
@@ -6869,129 +6922,98 @@
                 <a:t> </a:t>
               </a:r>
               <a:r>
-                <a:rPr lang="en-US" dirty="0" smtClean="0">
+                <a:rPr lang="en-US" sz="1400" dirty="0" smtClean="0">
                   <a:solidFill>
                     <a:schemeClr val="accent2">
                       <a:lumMod val="75000"/>
                     </a:schemeClr>
                   </a:solidFill>
                 </a:rPr>
-                <a:t>       shared pointer: lm0</a:t>
-              </a:r>
-            </a:p>
-            <a:p>
-              <a:r>
-                <a:rPr lang="en-US" dirty="0">
+                <a:t>       shared pointer: </a:t>
+              </a:r>
+              <a:r>
+                <a:rPr lang="en-US" sz="1400" dirty="0" smtClean="0">
                   <a:solidFill>
                     <a:schemeClr val="accent2">
                       <a:lumMod val="75000"/>
                     </a:schemeClr>
                   </a:solidFill>
                 </a:rPr>
-                <a:t> </a:t>
-              </a:r>
-              <a:r>
-                <a:rPr lang="en-US" dirty="0" smtClean="0">
+                <a:t>maturity</a:t>
+              </a:r>
+              <a:endParaRPr lang="en-US" sz="1400" dirty="0" smtClean="0">
+                <a:solidFill>
+                  <a:schemeClr val="accent2">
+                    <a:lumMod val="75000"/>
+                  </a:schemeClr>
+                </a:solidFill>
+              </a:endParaRPr>
+            </a:p>
+            <a:p>
+              <a:r>
+                <a:rPr lang="en-US" sz="1400" dirty="0">
                   <a:solidFill>
                     <a:schemeClr val="accent2">
                       <a:lumMod val="75000"/>
                     </a:schemeClr>
                   </a:solidFill>
                 </a:rPr>
-                <a:t>       shared pointer: </a:t>
-              </a:r>
-              <a:r>
-                <a:rPr lang="en-US" dirty="0" smtClean="0">
+                <a:t> </a:t>
+              </a:r>
+              <a:r>
+                <a:rPr lang="en-US" sz="1400" dirty="0" smtClean="0">
                   <a:solidFill>
                     <a:schemeClr val="accent2">
                       <a:lumMod val="75000"/>
                     </a:schemeClr>
                   </a:solidFill>
                 </a:rPr>
-                <a:t>d0)</a:t>
+                <a:t>       </a:t>
+              </a:r>
+              <a:r>
+                <a:rPr lang="en-US" sz="1400" dirty="0" smtClean="0">
+                  <a:solidFill>
+                    <a:schemeClr val="accent2">
+                      <a:lumMod val="75000"/>
+                    </a:schemeClr>
+                  </a:solidFill>
+                </a:rPr>
+                <a:t>shared </a:t>
+              </a:r>
+              <a:r>
+                <a:rPr lang="en-US" sz="1400" dirty="0" smtClean="0">
+                  <a:solidFill>
+                    <a:schemeClr val="accent2">
+                      <a:lumMod val="75000"/>
+                    </a:schemeClr>
+                  </a:solidFill>
+                </a:rPr>
+                <a:t>pointer: </a:t>
+              </a:r>
+              <a:r>
+                <a:rPr lang="en-US" sz="1400" dirty="0" smtClean="0">
+                  <a:solidFill>
+                    <a:schemeClr val="accent2">
+                      <a:lumMod val="75000"/>
+                    </a:schemeClr>
+                  </a:solidFill>
+                </a:rPr>
+                <a:t>info</a:t>
+              </a:r>
+              <a:r>
+                <a:rPr lang="en-US" dirty="0" smtClean="0">
+                  <a:solidFill>
+                    <a:schemeClr val="accent2">
+                      <a:lumMod val="75000"/>
+                    </a:schemeClr>
+                  </a:solidFill>
+                </a:rPr>
+                <a:t>)</a:t>
               </a:r>
               <a:endParaRPr lang="en-US" dirty="0" smtClean="0">
                 <a:solidFill>
                   <a:schemeClr val="accent2">
                     <a:lumMod val="75000"/>
-                  </a:schemeClr>
-                </a:solidFill>
-              </a:endParaRPr>
-            </a:p>
-          </p:txBody>
-        </p:sp>
-        <p:cxnSp>
-          <p:nvCxnSpPr>
-            <p:cNvPr id="12" name="Straight Arrow Connector 11"/>
-            <p:cNvCxnSpPr>
-              <a:stCxn id="4" idx="3"/>
-              <a:endCxn id="6" idx="1"/>
-            </p:cNvCxnSpPr>
-            <p:nvPr/>
-          </p:nvCxnSpPr>
-          <p:spPr>
-            <a:xfrm>
-              <a:off x="1865167" y="1238250"/>
-              <a:ext cx="796385" cy="0"/>
-            </a:xfrm>
-            <a:prstGeom prst="straightConnector1">
-              <a:avLst/>
-            </a:prstGeom>
-            <a:ln w="15875">
-              <a:tailEnd type="triangle"/>
-            </a:ln>
-          </p:spPr>
-          <p:style>
-            <a:lnRef idx="1">
-              <a:schemeClr val="accent1"/>
-            </a:lnRef>
-            <a:fillRef idx="0">
-              <a:schemeClr val="accent1"/>
-            </a:fillRef>
-            <a:effectRef idx="0">
-              <a:schemeClr val="accent1"/>
-            </a:effectRef>
-            <a:fontRef idx="minor">
-              <a:schemeClr val="tx1"/>
-            </a:fontRef>
-          </p:style>
-        </p:cxnSp>
-        <p:sp>
-          <p:nvSpPr>
-            <p:cNvPr id="15" name="TextBox 14"/>
-            <p:cNvSpPr txBox="1"/>
-            <p:nvPr/>
-          </p:nvSpPr>
-          <p:spPr>
-            <a:xfrm>
-              <a:off x="1865167" y="876300"/>
-              <a:ext cx="781050" cy="369332"/>
-            </a:xfrm>
-            <a:prstGeom prst="rect">
-              <a:avLst/>
-            </a:prstGeom>
-            <a:noFill/>
-          </p:spPr>
-          <p:txBody>
-            <a:bodyPr wrap="square" rtlCol="0">
-              <a:spAutoFit/>
-            </a:bodyPr>
-            <a:lstStyle/>
-            <a:p>
-              <a:r>
-                <a:rPr lang="en-US" dirty="0" smtClean="0">
-                  <a:solidFill>
-                    <a:schemeClr val="accent1">
-                      <a:lumMod val="50000"/>
-                    </a:schemeClr>
-                  </a:solidFill>
-                </a:rPr>
-                <a:t>new()</a:t>
-              </a:r>
-              <a:endParaRPr lang="en-US" dirty="0">
-                <a:solidFill>
-                  <a:schemeClr val="accent1">
-                    <a:lumMod val="50000"/>
                   </a:schemeClr>
                 </a:solidFill>
               </a:endParaRPr>
@@ -7251,41 +7273,6 @@
         </p:sp>
         <p:sp>
           <p:nvSpPr>
-            <p:cNvPr id="24" name="TextBox 23"/>
-            <p:cNvSpPr txBox="1"/>
-            <p:nvPr/>
-          </p:nvSpPr>
-          <p:spPr>
-            <a:xfrm>
-              <a:off x="315545" y="3583279"/>
-              <a:ext cx="2133600" cy="369332"/>
-            </a:xfrm>
-            <a:prstGeom prst="rect">
-              <a:avLst/>
-            </a:prstGeom>
-            <a:noFill/>
-          </p:spPr>
-          <p:txBody>
-            <a:bodyPr wrap="square" rtlCol="0">
-              <a:spAutoFit/>
-            </a:bodyPr>
-            <a:lstStyle/>
-            <a:p>
-              <a:r>
-                <a:rPr lang="en-US" dirty="0" smtClean="0">
-                  <a:solidFill>
-                    <a:schemeClr val="accent2">
-                      <a:lumMod val="75000"/>
-                    </a:schemeClr>
-                  </a:solidFill>
-                </a:rPr>
-                <a:t>shared pointer: lm0</a:t>
-              </a:r>
-            </a:p>
-          </p:txBody>
-        </p:sp>
-        <p:sp>
-          <p:nvSpPr>
             <p:cNvPr id="37" name="Rectangle 36"/>
             <p:cNvSpPr/>
             <p:nvPr/>
@@ -8158,8 +8145,15 @@
                     </a:schemeClr>
                   </a:solidFill>
                 </a:rPr>
-                <a:t>d0</a:t>
-              </a:r>
+                <a:t>info</a:t>
+              </a:r>
+              <a:endParaRPr lang="en-US" dirty="0" smtClean="0">
+                <a:solidFill>
+                  <a:schemeClr val="accent2">
+                    <a:lumMod val="75000"/>
+                  </a:schemeClr>
+                </a:solidFill>
+              </a:endParaRPr>
             </a:p>
           </p:txBody>
         </p:sp>
@@ -8245,6 +8239,262 @@
           </p:txBody>
         </p:sp>
       </p:grpSp>
+      <p:sp>
+        <p:nvSpPr>
+          <p:cNvPr id="38" name="Rectangle 37"/>
+          <p:cNvSpPr/>
+          <p:nvPr/>
+        </p:nvSpPr>
+        <p:spPr>
+          <a:xfrm>
+            <a:off x="245917" y="723900"/>
+            <a:ext cx="1220045" cy="1028700"/>
+          </a:xfrm>
+          <a:prstGeom prst="rect">
+            <a:avLst/>
+          </a:prstGeom>
+          <a:solidFill>
+            <a:schemeClr val="accent1">
+              <a:lumMod val="20000"/>
+              <a:lumOff val="80000"/>
+            </a:schemeClr>
+          </a:solidFill>
+          <a:ln>
+            <a:solidFill>
+              <a:schemeClr val="accent1">
+                <a:lumMod val="50000"/>
+              </a:schemeClr>
+            </a:solidFill>
+          </a:ln>
+        </p:spPr>
+        <p:style>
+          <a:lnRef idx="2">
+            <a:schemeClr val="accent1">
+              <a:shade val="50000"/>
+            </a:schemeClr>
+          </a:lnRef>
+          <a:fillRef idx="1">
+            <a:schemeClr val="accent1"/>
+          </a:fillRef>
+          <a:effectRef idx="0">
+            <a:schemeClr val="accent1"/>
+          </a:effectRef>
+          <a:fontRef idx="minor">
+            <a:schemeClr val="lt1"/>
+          </a:fontRef>
+        </p:style>
+        <p:txBody>
+          <a:bodyPr rtlCol="0" anchor="ctr"/>
+          <a:lstStyle/>
+          <a:p>
+            <a:r>
+              <a:rPr lang="en-US" b="1" dirty="0" smtClean="0">
+                <a:solidFill>
+                  <a:schemeClr val="accent1">
+                    <a:lumMod val="50000"/>
+                  </a:schemeClr>
+                </a:solidFill>
+              </a:rPr>
+              <a:t>maturity</a:t>
+            </a:r>
+            <a:endParaRPr lang="en-US" b="1" dirty="0" smtClean="0">
+              <a:solidFill>
+                <a:schemeClr val="accent1">
+                  <a:lumMod val="50000"/>
+                </a:schemeClr>
+              </a:solidFill>
+            </a:endParaRPr>
+          </a:p>
+          <a:p>
+            <a:pPr marL="285750" indent="-285750">
+              <a:buFont typeface="Arial" panose="020B0604020202020204" pitchFamily="34" charset="0"/>
+              <a:buChar char="•"/>
+            </a:pPr>
+            <a:r>
+              <a:rPr lang="en-US" dirty="0" smtClean="0">
+                <a:solidFill>
+                  <a:schemeClr val="accent1">
+                    <a:lumMod val="50000"/>
+                  </a:schemeClr>
+                </a:solidFill>
+              </a:rPr>
+              <a:t>median</a:t>
+            </a:r>
+          </a:p>
+          <a:p>
+            <a:pPr marL="285750" indent="-285750">
+              <a:buFont typeface="Arial" panose="020B0604020202020204" pitchFamily="34" charset="0"/>
+              <a:buChar char="•"/>
+            </a:pPr>
+            <a:r>
+              <a:rPr lang="en-US" dirty="0" smtClean="0">
+                <a:solidFill>
+                  <a:schemeClr val="accent1">
+                    <a:lumMod val="50000"/>
+                  </a:schemeClr>
+                </a:solidFill>
+              </a:rPr>
+              <a:t>slope</a:t>
+            </a:r>
+            <a:endParaRPr lang="en-US" dirty="0">
+              <a:solidFill>
+                <a:schemeClr val="accent1">
+                  <a:lumMod val="50000"/>
+                </a:schemeClr>
+              </a:solidFill>
+            </a:endParaRPr>
+          </a:p>
+        </p:txBody>
+      </p:sp>
+      <p:cxnSp>
+        <p:nvCxnSpPr>
+          <p:cNvPr id="40" name="Straight Arrow Connector 39"/>
+          <p:cNvCxnSpPr>
+            <a:stCxn id="38" idx="3"/>
+          </p:cNvCxnSpPr>
+          <p:nvPr/>
+        </p:nvCxnSpPr>
+        <p:spPr>
+          <a:xfrm>
+            <a:off x="1465962" y="1238250"/>
+            <a:ext cx="1195589" cy="0"/>
+          </a:xfrm>
+          <a:prstGeom prst="straightConnector1">
+            <a:avLst/>
+          </a:prstGeom>
+          <a:ln w="15875">
+            <a:tailEnd type="triangle"/>
+          </a:ln>
+        </p:spPr>
+        <p:style>
+          <a:lnRef idx="1">
+            <a:schemeClr val="accent1"/>
+          </a:lnRef>
+          <a:fillRef idx="0">
+            <a:schemeClr val="accent1"/>
+          </a:fillRef>
+          <a:effectRef idx="0">
+            <a:schemeClr val="accent1"/>
+          </a:effectRef>
+          <a:fontRef idx="minor">
+            <a:schemeClr val="tx1"/>
+          </a:fontRef>
+        </p:style>
+      </p:cxnSp>
+      <p:sp>
+        <p:nvSpPr>
+          <p:cNvPr id="41" name="TextBox 40"/>
+          <p:cNvSpPr txBox="1"/>
+          <p:nvPr/>
+        </p:nvSpPr>
+        <p:spPr>
+          <a:xfrm>
+            <a:off x="1405580" y="944268"/>
+            <a:ext cx="1443753" cy="307777"/>
+          </a:xfrm>
+          <a:prstGeom prst="rect">
+            <a:avLst/>
+          </a:prstGeom>
+          <a:noFill/>
+        </p:spPr>
+        <p:txBody>
+          <a:bodyPr wrap="square" rtlCol="0">
+            <a:spAutoFit/>
+          </a:bodyPr>
+          <a:lstStyle/>
+          <a:p>
+            <a:r>
+              <a:rPr lang="en-US" sz="1400" dirty="0">
+                <a:solidFill>
+                  <a:schemeClr val="accent1">
+                    <a:lumMod val="50000"/>
+                  </a:schemeClr>
+                </a:solidFill>
+              </a:rPr>
+              <a:t>m</a:t>
+            </a:r>
+            <a:r>
+              <a:rPr lang="en-US" sz="1400" dirty="0" smtClean="0">
+                <a:solidFill>
+                  <a:schemeClr val="accent1">
+                    <a:lumMod val="50000"/>
+                  </a:schemeClr>
+                </a:solidFill>
+              </a:rPr>
+              <a:t>ethods::new</a:t>
+            </a:r>
+            <a:r>
+              <a:rPr lang="en-US" sz="1400" dirty="0" smtClean="0">
+                <a:solidFill>
+                  <a:schemeClr val="accent1">
+                    <a:lumMod val="50000"/>
+                  </a:schemeClr>
+                </a:solidFill>
+              </a:rPr>
+              <a:t>()</a:t>
+            </a:r>
+            <a:endParaRPr lang="en-US" sz="1400" dirty="0">
+              <a:solidFill>
+                <a:schemeClr val="accent1">
+                  <a:lumMod val="50000"/>
+                </a:schemeClr>
+              </a:solidFill>
+            </a:endParaRPr>
+          </a:p>
+        </p:txBody>
+      </p:sp>
+      <p:sp>
+        <p:nvSpPr>
+          <p:cNvPr id="42" name="TextBox 41"/>
+          <p:cNvSpPr txBox="1"/>
+          <p:nvPr/>
+        </p:nvSpPr>
+        <p:spPr>
+          <a:xfrm>
+            <a:off x="630323" y="3471935"/>
+            <a:ext cx="1792926" cy="646331"/>
+          </a:xfrm>
+          <a:prstGeom prst="rect">
+            <a:avLst/>
+          </a:prstGeom>
+          <a:noFill/>
+        </p:spPr>
+        <p:txBody>
+          <a:bodyPr wrap="square" rtlCol="0">
+            <a:spAutoFit/>
+          </a:bodyPr>
+          <a:lstStyle/>
+          <a:p>
+            <a:r>
+              <a:rPr lang="en-US" dirty="0" smtClean="0">
+                <a:solidFill>
+                  <a:schemeClr val="accent2">
+                    <a:lumMod val="75000"/>
+                  </a:schemeClr>
+                </a:solidFill>
+              </a:rPr>
+              <a:t>shared pointer: </a:t>
+            </a:r>
+            <a:r>
+              <a:rPr lang="en-US" dirty="0" smtClean="0">
+                <a:solidFill>
+                  <a:schemeClr val="accent2">
+                    <a:lumMod val="75000"/>
+                  </a:schemeClr>
+                </a:solidFill>
+              </a:rPr>
+              <a:t>maturity</a:t>
+            </a:r>
+            <a:endParaRPr lang="en-US" dirty="0" smtClean="0">
+              <a:solidFill>
+                <a:schemeClr val="accent2">
+                  <a:lumMod val="75000"/>
+                </a:schemeClr>
+              </a:solidFill>
+            </a:endParaRPr>
+          </a:p>
+        </p:txBody>
+      </p:sp>
     </p:spTree>
     <p:extLst>
       <p:ext uri="{BB962C8B-B14F-4D97-AF65-F5344CB8AC3E}">
@@ -8291,113 +8541,6 @@
         </p:grpSpPr>
         <p:sp>
           <p:nvSpPr>
-            <p:cNvPr id="4" name="Rectangle 3"/>
-            <p:cNvSpPr/>
-            <p:nvPr/>
-          </p:nvSpPr>
-          <p:spPr>
-            <a:xfrm>
-              <a:off x="245917" y="723900"/>
-              <a:ext cx="1619250" cy="1028700"/>
-            </a:xfrm>
-            <a:prstGeom prst="rect">
-              <a:avLst/>
-            </a:prstGeom>
-            <a:solidFill>
-              <a:schemeClr val="accent1">
-                <a:lumMod val="20000"/>
-                <a:lumOff val="80000"/>
-              </a:schemeClr>
-            </a:solidFill>
-            <a:ln>
-              <a:solidFill>
-                <a:schemeClr val="accent1">
-                  <a:lumMod val="50000"/>
-                </a:schemeClr>
-              </a:solidFill>
-            </a:ln>
-          </p:spPr>
-          <p:style>
-            <a:lnRef idx="2">
-              <a:schemeClr val="accent1">
-                <a:shade val="50000"/>
-              </a:schemeClr>
-            </a:lnRef>
-            <a:fillRef idx="1">
-              <a:schemeClr val="accent1"/>
-            </a:fillRef>
-            <a:effectRef idx="0">
-              <a:schemeClr val="accent1"/>
-            </a:effectRef>
-            <a:fontRef idx="minor">
-              <a:schemeClr val="lt1"/>
-            </a:fontRef>
-          </p:style>
-          <p:txBody>
-            <a:bodyPr rtlCol="0" anchor="ctr"/>
-            <a:lstStyle/>
-            <a:p>
-              <a:r>
-                <a:rPr lang="en-US" b="1" dirty="0" err="1" smtClean="0">
-                  <a:solidFill>
-                    <a:schemeClr val="accent1">
-                      <a:lumMod val="50000"/>
-                    </a:schemeClr>
-                  </a:solidFill>
-                </a:rPr>
-                <a:t>fims$maturity</a:t>
-              </a:r>
-              <a:endParaRPr lang="en-US" b="1" dirty="0" smtClean="0">
-                <a:solidFill>
-                  <a:schemeClr val="accent1">
-                    <a:lumMod val="50000"/>
-                  </a:schemeClr>
-                </a:solidFill>
-              </a:endParaRPr>
-            </a:p>
-            <a:p>
-              <a:pPr marL="285750" indent="-285750">
-                <a:buFont typeface="Arial" panose="020B0604020202020204" pitchFamily="34" charset="0"/>
-                <a:buChar char="•"/>
-              </a:pPr>
-              <a:r>
-                <a:rPr lang="en-US" dirty="0" smtClean="0">
-                  <a:solidFill>
-                    <a:schemeClr val="accent1">
-                      <a:lumMod val="50000"/>
-                    </a:schemeClr>
-                  </a:solidFill>
-                </a:rPr>
-                <a:t>median</a:t>
-              </a:r>
-            </a:p>
-            <a:p>
-              <a:pPr marL="285750" indent="-285750">
-                <a:buFont typeface="Arial" panose="020B0604020202020204" pitchFamily="34" charset="0"/>
-                <a:buChar char="•"/>
-              </a:pPr>
-              <a:r>
-                <a:rPr lang="en-US" dirty="0" smtClean="0">
-                  <a:solidFill>
-                    <a:schemeClr val="accent1">
-                      <a:lumMod val="50000"/>
-                    </a:schemeClr>
-                  </a:solidFill>
-                </a:rPr>
-                <a:t>slope</a:t>
-              </a:r>
-              <a:endParaRPr lang="en-US" dirty="0">
-                <a:solidFill>
-                  <a:schemeClr val="accent1">
-                    <a:lumMod val="50000"/>
-                  </a:schemeClr>
-                </a:solidFill>
-              </a:endParaRPr>
-            </a:p>
-          </p:txBody>
-        </p:sp>
-        <p:sp>
-          <p:nvSpPr>
             <p:cNvPr id="6" name="Rectangle 5"/>
             <p:cNvSpPr/>
             <p:nvPr/>
@@ -8452,7 +8595,7 @@
                     </a:schemeClr>
                   </a:solidFill>
                 </a:rPr>
-                <a:t>fims$LogisticMaturity</a:t>
+                <a:t>LogisticMaturity</a:t>
               </a:r>
               <a:endParaRPr lang="en-US" b="1" dirty="0" smtClean="0">
                 <a:solidFill>
@@ -8646,10 +8789,17 @@
                 </a:rPr>
                 <a:t>(</a:t>
               </a:r>
-            </a:p>
-            <a:p>
-              <a:r>
-                <a:rPr lang="en-US" dirty="0">
+              <a:endParaRPr lang="en-US" sz="1400" dirty="0" smtClean="0">
+                <a:solidFill>
+                  <a:schemeClr val="accent2">
+                    <a:lumMod val="75000"/>
+                  </a:schemeClr>
+                </a:solidFill>
+              </a:endParaRPr>
+            </a:p>
+            <a:p>
+              <a:r>
+                <a:rPr lang="en-US" sz="1400" dirty="0">
                   <a:solidFill>
                     <a:schemeClr val="accent2">
                       <a:lumMod val="75000"/>
@@ -8659,129 +8809,78 @@
                 <a:t> </a:t>
               </a:r>
               <a:r>
-                <a:rPr lang="en-US" dirty="0" smtClean="0">
+                <a:rPr lang="en-US" sz="1400" dirty="0" smtClean="0">
                   <a:solidFill>
                     <a:schemeClr val="accent2">
                       <a:lumMod val="75000"/>
                     </a:schemeClr>
                   </a:solidFill>
                 </a:rPr>
-                <a:t>       shared pointer: lm0</a:t>
-              </a:r>
-            </a:p>
-            <a:p>
-              <a:r>
-                <a:rPr lang="en-US" dirty="0">
+                <a:t>       shared pointer: </a:t>
+              </a:r>
+              <a:r>
+                <a:rPr lang="en-US" sz="1400" dirty="0" smtClean="0">
                   <a:solidFill>
                     <a:schemeClr val="accent2">
                       <a:lumMod val="75000"/>
                     </a:schemeClr>
                   </a:solidFill>
                 </a:rPr>
-                <a:t> </a:t>
-              </a:r>
-              <a:r>
-                <a:rPr lang="en-US" dirty="0" smtClean="0">
+                <a:t>maturity</a:t>
+              </a:r>
+              <a:endParaRPr lang="en-US" sz="1400" dirty="0" smtClean="0">
+                <a:solidFill>
+                  <a:schemeClr val="accent2">
+                    <a:lumMod val="75000"/>
+                  </a:schemeClr>
+                </a:solidFill>
+              </a:endParaRPr>
+            </a:p>
+            <a:p>
+              <a:r>
+                <a:rPr lang="en-US" sz="1400" dirty="0">
                   <a:solidFill>
                     <a:schemeClr val="accent2">
                       <a:lumMod val="75000"/>
                     </a:schemeClr>
                   </a:solidFill>
                 </a:rPr>
-                <a:t>       shared pointer: </a:t>
-              </a:r>
-              <a:r>
-                <a:rPr lang="en-US" dirty="0" smtClean="0">
+                <a:t> </a:t>
+              </a:r>
+              <a:r>
+                <a:rPr lang="en-US" sz="1400" dirty="0" smtClean="0">
                   <a:solidFill>
                     <a:schemeClr val="accent2">
                       <a:lumMod val="75000"/>
                     </a:schemeClr>
                   </a:solidFill>
                 </a:rPr>
-                <a:t>d0)</a:t>
+                <a:t>       shared pointer: </a:t>
+              </a:r>
+              <a:r>
+                <a:rPr lang="en-US" sz="1400" dirty="0" smtClean="0">
+                  <a:solidFill>
+                    <a:schemeClr val="accent2">
+                      <a:lumMod val="75000"/>
+                    </a:schemeClr>
+                  </a:solidFill>
+                </a:rPr>
+                <a:t>info</a:t>
+              </a:r>
+              <a:r>
+                <a:rPr lang="en-US" dirty="0" smtClean="0">
+                  <a:solidFill>
+                    <a:schemeClr val="accent2">
+                      <a:lumMod val="75000"/>
+                    </a:schemeClr>
+                  </a:solidFill>
+                </a:rPr>
+                <a:t>)</a:t>
               </a:r>
               <a:endParaRPr lang="en-US" dirty="0" smtClean="0">
                 <a:solidFill>
                   <a:schemeClr val="accent2">
                     <a:lumMod val="75000"/>
-                  </a:schemeClr>
-                </a:solidFill>
-              </a:endParaRPr>
-            </a:p>
-          </p:txBody>
-        </p:sp>
-        <p:cxnSp>
-          <p:nvCxnSpPr>
-            <p:cNvPr id="12" name="Straight Arrow Connector 11"/>
-            <p:cNvCxnSpPr>
-              <a:stCxn id="4" idx="3"/>
-              <a:endCxn id="6" idx="1"/>
-            </p:cNvCxnSpPr>
-            <p:nvPr/>
-          </p:nvCxnSpPr>
-          <p:spPr>
-            <a:xfrm>
-              <a:off x="1865167" y="1238250"/>
-              <a:ext cx="796385" cy="0"/>
-            </a:xfrm>
-            <a:prstGeom prst="straightConnector1">
-              <a:avLst/>
-            </a:prstGeom>
-            <a:ln w="15875">
-              <a:tailEnd type="triangle"/>
-            </a:ln>
-          </p:spPr>
-          <p:style>
-            <a:lnRef idx="1">
-              <a:schemeClr val="accent1"/>
-            </a:lnRef>
-            <a:fillRef idx="0">
-              <a:schemeClr val="accent1"/>
-            </a:fillRef>
-            <a:effectRef idx="0">
-              <a:schemeClr val="accent1"/>
-            </a:effectRef>
-            <a:fontRef idx="minor">
-              <a:schemeClr val="tx1"/>
-            </a:fontRef>
-          </p:style>
-        </p:cxnSp>
-        <p:sp>
-          <p:nvSpPr>
-            <p:cNvPr id="15" name="TextBox 14"/>
-            <p:cNvSpPr txBox="1"/>
-            <p:nvPr/>
-          </p:nvSpPr>
-          <p:spPr>
-            <a:xfrm>
-              <a:off x="1865167" y="876300"/>
-              <a:ext cx="781050" cy="369332"/>
-            </a:xfrm>
-            <a:prstGeom prst="rect">
-              <a:avLst/>
-            </a:prstGeom>
-            <a:noFill/>
-          </p:spPr>
-          <p:txBody>
-            <a:bodyPr wrap="square" rtlCol="0">
-              <a:spAutoFit/>
-            </a:bodyPr>
-            <a:lstStyle/>
-            <a:p>
-              <a:r>
-                <a:rPr lang="en-US" dirty="0" smtClean="0">
-                  <a:solidFill>
-                    <a:schemeClr val="accent1">
-                      <a:lumMod val="50000"/>
-                    </a:schemeClr>
-                  </a:solidFill>
-                </a:rPr>
-                <a:t>new()</a:t>
-              </a:r>
-              <a:endParaRPr lang="en-US" dirty="0">
-                <a:solidFill>
-                  <a:schemeClr val="accent1">
-                    <a:lumMod val="50000"/>
                   </a:schemeClr>
                 </a:solidFill>
               </a:endParaRPr>
@@ -9041,41 +9140,6 @@
         </p:sp>
         <p:sp>
           <p:nvSpPr>
-            <p:cNvPr id="24" name="TextBox 23"/>
-            <p:cNvSpPr txBox="1"/>
-            <p:nvPr/>
-          </p:nvSpPr>
-          <p:spPr>
-            <a:xfrm>
-              <a:off x="315545" y="3583279"/>
-              <a:ext cx="2133600" cy="369332"/>
-            </a:xfrm>
-            <a:prstGeom prst="rect">
-              <a:avLst/>
-            </a:prstGeom>
-            <a:noFill/>
-          </p:spPr>
-          <p:txBody>
-            <a:bodyPr wrap="square" rtlCol="0">
-              <a:spAutoFit/>
-            </a:bodyPr>
-            <a:lstStyle/>
-            <a:p>
-              <a:r>
-                <a:rPr lang="en-US" dirty="0" smtClean="0">
-                  <a:solidFill>
-                    <a:schemeClr val="accent2">
-                      <a:lumMod val="75000"/>
-                    </a:schemeClr>
-                  </a:solidFill>
-                </a:rPr>
-                <a:t>shared pointer: lm0</a:t>
-              </a:r>
-            </a:p>
-          </p:txBody>
-        </p:sp>
-        <p:sp>
-          <p:nvSpPr>
             <p:cNvPr id="37" name="Rectangle 36"/>
             <p:cNvSpPr/>
             <p:nvPr/>
@@ -9293,7 +9357,6 @@
             <p:cNvPr id="50" name="Straight Arrow Connector 49"/>
             <p:cNvCxnSpPr>
               <a:stCxn id="37" idx="3"/>
-              <a:endCxn id="46" idx="1"/>
             </p:cNvCxnSpPr>
             <p:nvPr/>
           </p:nvCxnSpPr>
@@ -9655,11 +9718,7 @@
               </a:r>
               <a:r>
                 <a:rPr lang="en-US" dirty="0" smtClean="0"/>
-                <a:t>::</a:t>
-              </a:r>
-              <a:r>
-                <a:rPr lang="en-US" dirty="0" smtClean="0"/>
-                <a:t>Information </a:t>
+                <a:t>::Information </a:t>
               </a:r>
               <a:endParaRPr lang="en-US" dirty="0"/>
             </a:p>
@@ -10067,8 +10126,15 @@
                     </a:schemeClr>
                   </a:solidFill>
                 </a:rPr>
-                <a:t>d0</a:t>
-              </a:r>
+                <a:t>info</a:t>
+              </a:r>
+              <a:endParaRPr lang="en-US" dirty="0" smtClean="0">
+                <a:solidFill>
+                  <a:schemeClr val="accent2">
+                    <a:lumMod val="75000"/>
+                  </a:schemeClr>
+                </a:solidFill>
+              </a:endParaRPr>
             </a:p>
           </p:txBody>
         </p:sp>
@@ -10142,7 +10208,17 @@
                     </a:schemeClr>
                   </a:solidFill>
                 </a:rPr>
-                <a:t>d0-&gt;</a:t>
+                <a:t>info</a:t>
+              </a:r>
+              <a:r>
+                <a:rPr lang="en-US" dirty="0" smtClean="0">
+                  <a:solidFill>
+                    <a:schemeClr val="accent2">
+                      <a:lumMod val="75000"/>
+                    </a:schemeClr>
+                  </a:solidFill>
+                </a:rPr>
+                <a:t>-&gt;</a:t>
               </a:r>
               <a:r>
                 <a:rPr lang="en-US" dirty="0" err="1" smtClean="0">
@@ -10273,6 +10349,262 @@
           </p:txBody>
         </p:sp>
       </p:grpSp>
+      <p:sp>
+        <p:nvSpPr>
+          <p:cNvPr id="48" name="Rectangle 47"/>
+          <p:cNvSpPr/>
+          <p:nvPr/>
+        </p:nvSpPr>
+        <p:spPr>
+          <a:xfrm>
+            <a:off x="245917" y="723900"/>
+            <a:ext cx="1220045" cy="1028700"/>
+          </a:xfrm>
+          <a:prstGeom prst="rect">
+            <a:avLst/>
+          </a:prstGeom>
+          <a:solidFill>
+            <a:schemeClr val="accent1">
+              <a:lumMod val="20000"/>
+              <a:lumOff val="80000"/>
+            </a:schemeClr>
+          </a:solidFill>
+          <a:ln>
+            <a:solidFill>
+              <a:schemeClr val="accent1">
+                <a:lumMod val="50000"/>
+              </a:schemeClr>
+            </a:solidFill>
+          </a:ln>
+        </p:spPr>
+        <p:style>
+          <a:lnRef idx="2">
+            <a:schemeClr val="accent1">
+              <a:shade val="50000"/>
+            </a:schemeClr>
+          </a:lnRef>
+          <a:fillRef idx="1">
+            <a:schemeClr val="accent1"/>
+          </a:fillRef>
+          <a:effectRef idx="0">
+            <a:schemeClr val="accent1"/>
+          </a:effectRef>
+          <a:fontRef idx="minor">
+            <a:schemeClr val="lt1"/>
+          </a:fontRef>
+        </p:style>
+        <p:txBody>
+          <a:bodyPr rtlCol="0" anchor="ctr"/>
+          <a:lstStyle/>
+          <a:p>
+            <a:r>
+              <a:rPr lang="en-US" b="1" dirty="0" smtClean="0">
+                <a:solidFill>
+                  <a:schemeClr val="accent1">
+                    <a:lumMod val="50000"/>
+                  </a:schemeClr>
+                </a:solidFill>
+              </a:rPr>
+              <a:t>maturity</a:t>
+            </a:r>
+            <a:endParaRPr lang="en-US" b="1" dirty="0" smtClean="0">
+              <a:solidFill>
+                <a:schemeClr val="accent1">
+                  <a:lumMod val="50000"/>
+                </a:schemeClr>
+              </a:solidFill>
+            </a:endParaRPr>
+          </a:p>
+          <a:p>
+            <a:pPr marL="285750" indent="-285750">
+              <a:buFont typeface="Arial" panose="020B0604020202020204" pitchFamily="34" charset="0"/>
+              <a:buChar char="•"/>
+            </a:pPr>
+            <a:r>
+              <a:rPr lang="en-US" dirty="0" smtClean="0">
+                <a:solidFill>
+                  <a:schemeClr val="accent1">
+                    <a:lumMod val="50000"/>
+                  </a:schemeClr>
+                </a:solidFill>
+              </a:rPr>
+              <a:t>median</a:t>
+            </a:r>
+          </a:p>
+          <a:p>
+            <a:pPr marL="285750" indent="-285750">
+              <a:buFont typeface="Arial" panose="020B0604020202020204" pitchFamily="34" charset="0"/>
+              <a:buChar char="•"/>
+            </a:pPr>
+            <a:r>
+              <a:rPr lang="en-US" dirty="0" smtClean="0">
+                <a:solidFill>
+                  <a:schemeClr val="accent1">
+                    <a:lumMod val="50000"/>
+                  </a:schemeClr>
+                </a:solidFill>
+              </a:rPr>
+              <a:t>slope</a:t>
+            </a:r>
+            <a:endParaRPr lang="en-US" dirty="0">
+              <a:solidFill>
+                <a:schemeClr val="accent1">
+                  <a:lumMod val="50000"/>
+                </a:schemeClr>
+              </a:solidFill>
+            </a:endParaRPr>
+          </a:p>
+        </p:txBody>
+      </p:sp>
+      <p:cxnSp>
+        <p:nvCxnSpPr>
+          <p:cNvPr id="49" name="Straight Arrow Connector 48"/>
+          <p:cNvCxnSpPr>
+            <a:stCxn id="48" idx="3"/>
+          </p:cNvCxnSpPr>
+          <p:nvPr/>
+        </p:nvCxnSpPr>
+        <p:spPr>
+          <a:xfrm>
+            <a:off x="1465962" y="1238250"/>
+            <a:ext cx="1195589" cy="0"/>
+          </a:xfrm>
+          <a:prstGeom prst="straightConnector1">
+            <a:avLst/>
+          </a:prstGeom>
+          <a:ln w="15875">
+            <a:tailEnd type="triangle"/>
+          </a:ln>
+        </p:spPr>
+        <p:style>
+          <a:lnRef idx="1">
+            <a:schemeClr val="accent1"/>
+          </a:lnRef>
+          <a:fillRef idx="0">
+            <a:schemeClr val="accent1"/>
+          </a:fillRef>
+          <a:effectRef idx="0">
+            <a:schemeClr val="accent1"/>
+          </a:effectRef>
+          <a:fontRef idx="minor">
+            <a:schemeClr val="tx1"/>
+          </a:fontRef>
+        </p:style>
+      </p:cxnSp>
+      <p:sp>
+        <p:nvSpPr>
+          <p:cNvPr id="51" name="TextBox 50"/>
+          <p:cNvSpPr txBox="1"/>
+          <p:nvPr/>
+        </p:nvSpPr>
+        <p:spPr>
+          <a:xfrm>
+            <a:off x="1405580" y="944268"/>
+            <a:ext cx="1443753" cy="307777"/>
+          </a:xfrm>
+          <a:prstGeom prst="rect">
+            <a:avLst/>
+          </a:prstGeom>
+          <a:noFill/>
+        </p:spPr>
+        <p:txBody>
+          <a:bodyPr wrap="square" rtlCol="0">
+            <a:spAutoFit/>
+          </a:bodyPr>
+          <a:lstStyle/>
+          <a:p>
+            <a:r>
+              <a:rPr lang="en-US" sz="1400" dirty="0">
+                <a:solidFill>
+                  <a:schemeClr val="accent1">
+                    <a:lumMod val="50000"/>
+                  </a:schemeClr>
+                </a:solidFill>
+              </a:rPr>
+              <a:t>m</a:t>
+            </a:r>
+            <a:r>
+              <a:rPr lang="en-US" sz="1400" dirty="0" smtClean="0">
+                <a:solidFill>
+                  <a:schemeClr val="accent1">
+                    <a:lumMod val="50000"/>
+                  </a:schemeClr>
+                </a:solidFill>
+              </a:rPr>
+              <a:t>ethods::new</a:t>
+            </a:r>
+            <a:r>
+              <a:rPr lang="en-US" sz="1400" dirty="0" smtClean="0">
+                <a:solidFill>
+                  <a:schemeClr val="accent1">
+                    <a:lumMod val="50000"/>
+                  </a:schemeClr>
+                </a:solidFill>
+              </a:rPr>
+              <a:t>()</a:t>
+            </a:r>
+            <a:endParaRPr lang="en-US" sz="1400" dirty="0">
+              <a:solidFill>
+                <a:schemeClr val="accent1">
+                  <a:lumMod val="50000"/>
+                </a:schemeClr>
+              </a:solidFill>
+            </a:endParaRPr>
+          </a:p>
+        </p:txBody>
+      </p:sp>
+      <p:sp>
+        <p:nvSpPr>
+          <p:cNvPr id="52" name="TextBox 51"/>
+          <p:cNvSpPr txBox="1"/>
+          <p:nvPr/>
+        </p:nvSpPr>
+        <p:spPr>
+          <a:xfrm>
+            <a:off x="630323" y="3471935"/>
+            <a:ext cx="1792926" cy="646331"/>
+          </a:xfrm>
+          <a:prstGeom prst="rect">
+            <a:avLst/>
+          </a:prstGeom>
+          <a:noFill/>
+        </p:spPr>
+        <p:txBody>
+          <a:bodyPr wrap="square" rtlCol="0">
+            <a:spAutoFit/>
+          </a:bodyPr>
+          <a:lstStyle/>
+          <a:p>
+            <a:r>
+              <a:rPr lang="en-US" dirty="0" smtClean="0">
+                <a:solidFill>
+                  <a:schemeClr val="accent2">
+                    <a:lumMod val="75000"/>
+                  </a:schemeClr>
+                </a:solidFill>
+              </a:rPr>
+              <a:t>shared pointer: </a:t>
+            </a:r>
+            <a:r>
+              <a:rPr lang="en-US" dirty="0" smtClean="0">
+                <a:solidFill>
+                  <a:schemeClr val="accent2">
+                    <a:lumMod val="75000"/>
+                  </a:schemeClr>
+                </a:solidFill>
+              </a:rPr>
+              <a:t>maturity</a:t>
+            </a:r>
+            <a:endParaRPr lang="en-US" dirty="0" smtClean="0">
+              <a:solidFill>
+                <a:schemeClr val="accent2">
+                  <a:lumMod val="75000"/>
+                </a:schemeClr>
+              </a:solidFill>
+            </a:endParaRPr>
+          </a:p>
+        </p:txBody>
+      </p:sp>
     </p:spTree>
     <p:extLst>
       <p:ext uri="{BB962C8B-B14F-4D97-AF65-F5344CB8AC3E}">
@@ -10319,113 +10651,6 @@
         </p:grpSpPr>
         <p:sp>
           <p:nvSpPr>
-            <p:cNvPr id="4" name="Rectangle 3"/>
-            <p:cNvSpPr/>
-            <p:nvPr/>
-          </p:nvSpPr>
-          <p:spPr>
-            <a:xfrm>
-              <a:off x="245917" y="723900"/>
-              <a:ext cx="1619250" cy="1028700"/>
-            </a:xfrm>
-            <a:prstGeom prst="rect">
-              <a:avLst/>
-            </a:prstGeom>
-            <a:solidFill>
-              <a:schemeClr val="accent1">
-                <a:lumMod val="20000"/>
-                <a:lumOff val="80000"/>
-              </a:schemeClr>
-            </a:solidFill>
-            <a:ln>
-              <a:solidFill>
-                <a:schemeClr val="accent1">
-                  <a:lumMod val="50000"/>
-                </a:schemeClr>
-              </a:solidFill>
-            </a:ln>
-          </p:spPr>
-          <p:style>
-            <a:lnRef idx="2">
-              <a:schemeClr val="accent1">
-                <a:shade val="50000"/>
-              </a:schemeClr>
-            </a:lnRef>
-            <a:fillRef idx="1">
-              <a:schemeClr val="accent1"/>
-            </a:fillRef>
-            <a:effectRef idx="0">
-              <a:schemeClr val="accent1"/>
-            </a:effectRef>
-            <a:fontRef idx="minor">
-              <a:schemeClr val="lt1"/>
-            </a:fontRef>
-          </p:style>
-          <p:txBody>
-            <a:bodyPr rtlCol="0" anchor="ctr"/>
-            <a:lstStyle/>
-            <a:p>
-              <a:r>
-                <a:rPr lang="en-US" b="1" dirty="0" err="1" smtClean="0">
-                  <a:solidFill>
-                    <a:schemeClr val="accent1">
-                      <a:lumMod val="50000"/>
-                    </a:schemeClr>
-                  </a:solidFill>
-                </a:rPr>
-                <a:t>fims$maturity</a:t>
-              </a:r>
-              <a:endParaRPr lang="en-US" b="1" dirty="0" smtClean="0">
-                <a:solidFill>
-                  <a:schemeClr val="accent1">
-                    <a:lumMod val="50000"/>
-                  </a:schemeClr>
-                </a:solidFill>
-              </a:endParaRPr>
-            </a:p>
-            <a:p>
-              <a:pPr marL="285750" indent="-285750">
-                <a:buFont typeface="Arial" panose="020B0604020202020204" pitchFamily="34" charset="0"/>
-                <a:buChar char="•"/>
-              </a:pPr>
-              <a:r>
-                <a:rPr lang="en-US" dirty="0" smtClean="0">
-                  <a:solidFill>
-                    <a:schemeClr val="accent1">
-                      <a:lumMod val="50000"/>
-                    </a:schemeClr>
-                  </a:solidFill>
-                </a:rPr>
-                <a:t>median</a:t>
-              </a:r>
-            </a:p>
-            <a:p>
-              <a:pPr marL="285750" indent="-285750">
-                <a:buFont typeface="Arial" panose="020B0604020202020204" pitchFamily="34" charset="0"/>
-                <a:buChar char="•"/>
-              </a:pPr>
-              <a:r>
-                <a:rPr lang="en-US" dirty="0" smtClean="0">
-                  <a:solidFill>
-                    <a:schemeClr val="accent1">
-                      <a:lumMod val="50000"/>
-                    </a:schemeClr>
-                  </a:solidFill>
-                </a:rPr>
-                <a:t>slope</a:t>
-              </a:r>
-              <a:endParaRPr lang="en-US" dirty="0">
-                <a:solidFill>
-                  <a:schemeClr val="accent1">
-                    <a:lumMod val="50000"/>
-                  </a:schemeClr>
-                </a:solidFill>
-              </a:endParaRPr>
-            </a:p>
-          </p:txBody>
-        </p:sp>
-        <p:sp>
-          <p:nvSpPr>
             <p:cNvPr id="6" name="Rectangle 5"/>
             <p:cNvSpPr/>
             <p:nvPr/>
@@ -10480,7 +10705,7 @@
                     </a:schemeClr>
                   </a:solidFill>
                 </a:rPr>
-                <a:t>fims$LogisticMaturity</a:t>
+                <a:t>LogisticMaturity</a:t>
               </a:r>
               <a:endParaRPr lang="en-US" b="1" dirty="0" smtClean="0">
                 <a:solidFill>
@@ -10674,10 +10899,17 @@
                 </a:rPr>
                 <a:t>(</a:t>
               </a:r>
-            </a:p>
-            <a:p>
-              <a:r>
-                <a:rPr lang="en-US" dirty="0">
+              <a:endParaRPr lang="en-US" sz="1400" dirty="0" smtClean="0">
+                <a:solidFill>
+                  <a:schemeClr val="accent2">
+                    <a:lumMod val="75000"/>
+                  </a:schemeClr>
+                </a:solidFill>
+              </a:endParaRPr>
+            </a:p>
+            <a:p>
+              <a:r>
+                <a:rPr lang="en-US" sz="1400" dirty="0">
                   <a:solidFill>
                     <a:schemeClr val="accent2">
                       <a:lumMod val="75000"/>
@@ -10687,129 +10919,78 @@
                 <a:t> </a:t>
               </a:r>
               <a:r>
-                <a:rPr lang="en-US" dirty="0" smtClean="0">
+                <a:rPr lang="en-US" sz="1400" dirty="0" smtClean="0">
                   <a:solidFill>
                     <a:schemeClr val="accent2">
                       <a:lumMod val="75000"/>
                     </a:schemeClr>
                   </a:solidFill>
                 </a:rPr>
-                <a:t>       shared pointer: lm0</a:t>
-              </a:r>
-            </a:p>
-            <a:p>
-              <a:r>
-                <a:rPr lang="en-US" dirty="0">
+                <a:t>       shared pointer: </a:t>
+              </a:r>
+              <a:r>
+                <a:rPr lang="en-US" sz="1400" dirty="0" smtClean="0">
                   <a:solidFill>
                     <a:schemeClr val="accent2">
                       <a:lumMod val="75000"/>
                     </a:schemeClr>
                   </a:solidFill>
                 </a:rPr>
-                <a:t> </a:t>
-              </a:r>
-              <a:r>
-                <a:rPr lang="en-US" dirty="0" smtClean="0">
+                <a:t>maturity</a:t>
+              </a:r>
+              <a:endParaRPr lang="en-US" sz="1400" dirty="0" smtClean="0">
+                <a:solidFill>
+                  <a:schemeClr val="accent2">
+                    <a:lumMod val="75000"/>
+                  </a:schemeClr>
+                </a:solidFill>
+              </a:endParaRPr>
+            </a:p>
+            <a:p>
+              <a:r>
+                <a:rPr lang="en-US" sz="1400" dirty="0">
                   <a:solidFill>
                     <a:schemeClr val="accent2">
                       <a:lumMod val="75000"/>
                     </a:schemeClr>
                   </a:solidFill>
                 </a:rPr>
-                <a:t>       shared pointer: </a:t>
-              </a:r>
-              <a:r>
-                <a:rPr lang="en-US" dirty="0" smtClean="0">
+                <a:t> </a:t>
+              </a:r>
+              <a:r>
+                <a:rPr lang="en-US" sz="1400" dirty="0" smtClean="0">
                   <a:solidFill>
                     <a:schemeClr val="accent2">
                       <a:lumMod val="75000"/>
                     </a:schemeClr>
                   </a:solidFill>
                 </a:rPr>
-                <a:t>d0)</a:t>
+                <a:t>       shared pointer: </a:t>
+              </a:r>
+              <a:r>
+                <a:rPr lang="en-US" sz="1400" dirty="0" smtClean="0">
+                  <a:solidFill>
+                    <a:schemeClr val="accent2">
+                      <a:lumMod val="75000"/>
+                    </a:schemeClr>
+                  </a:solidFill>
+                </a:rPr>
+                <a:t>info</a:t>
+              </a:r>
+              <a:r>
+                <a:rPr lang="en-US" dirty="0" smtClean="0">
+                  <a:solidFill>
+                    <a:schemeClr val="accent2">
+                      <a:lumMod val="75000"/>
+                    </a:schemeClr>
+                  </a:solidFill>
+                </a:rPr>
+                <a:t>)</a:t>
               </a:r>
               <a:endParaRPr lang="en-US" dirty="0" smtClean="0">
                 <a:solidFill>
                   <a:schemeClr val="accent2">
                     <a:lumMod val="75000"/>
-                  </a:schemeClr>
-                </a:solidFill>
-              </a:endParaRPr>
-            </a:p>
-          </p:txBody>
-        </p:sp>
-        <p:cxnSp>
-          <p:nvCxnSpPr>
-            <p:cNvPr id="12" name="Straight Arrow Connector 11"/>
-            <p:cNvCxnSpPr>
-              <a:stCxn id="4" idx="3"/>
-              <a:endCxn id="6" idx="1"/>
-            </p:cNvCxnSpPr>
-            <p:nvPr/>
-          </p:nvCxnSpPr>
-          <p:spPr>
-            <a:xfrm>
-              <a:off x="1865167" y="1238250"/>
-              <a:ext cx="796385" cy="0"/>
-            </a:xfrm>
-            <a:prstGeom prst="straightConnector1">
-              <a:avLst/>
-            </a:prstGeom>
-            <a:ln w="15875">
-              <a:tailEnd type="triangle"/>
-            </a:ln>
-          </p:spPr>
-          <p:style>
-            <a:lnRef idx="1">
-              <a:schemeClr val="accent1"/>
-            </a:lnRef>
-            <a:fillRef idx="0">
-              <a:schemeClr val="accent1"/>
-            </a:fillRef>
-            <a:effectRef idx="0">
-              <a:schemeClr val="accent1"/>
-            </a:effectRef>
-            <a:fontRef idx="minor">
-              <a:schemeClr val="tx1"/>
-            </a:fontRef>
-          </p:style>
-        </p:cxnSp>
-        <p:sp>
-          <p:nvSpPr>
-            <p:cNvPr id="15" name="TextBox 14"/>
-            <p:cNvSpPr txBox="1"/>
-            <p:nvPr/>
-          </p:nvSpPr>
-          <p:spPr>
-            <a:xfrm>
-              <a:off x="1865167" y="876300"/>
-              <a:ext cx="781050" cy="369332"/>
-            </a:xfrm>
-            <a:prstGeom prst="rect">
-              <a:avLst/>
-            </a:prstGeom>
-            <a:noFill/>
-          </p:spPr>
-          <p:txBody>
-            <a:bodyPr wrap="square" rtlCol="0">
-              <a:spAutoFit/>
-            </a:bodyPr>
-            <a:lstStyle/>
-            <a:p>
-              <a:r>
-                <a:rPr lang="en-US" dirty="0" smtClean="0">
-                  <a:solidFill>
-                    <a:schemeClr val="accent1">
-                      <a:lumMod val="50000"/>
-                    </a:schemeClr>
-                  </a:solidFill>
-                </a:rPr>
-                <a:t>new()</a:t>
-              </a:r>
-              <a:endParaRPr lang="en-US" dirty="0">
-                <a:solidFill>
-                  <a:schemeClr val="accent1">
-                    <a:lumMod val="50000"/>
                   </a:schemeClr>
                 </a:solidFill>
               </a:endParaRPr>
@@ -11063,41 +11244,6 @@
                   </a:solidFill>
                 </a:rPr>
                 <a:t>evaluate(x)</a:t>
-              </a:r>
-            </a:p>
-          </p:txBody>
-        </p:sp>
-        <p:sp>
-          <p:nvSpPr>
-            <p:cNvPr id="24" name="TextBox 23"/>
-            <p:cNvSpPr txBox="1"/>
-            <p:nvPr/>
-          </p:nvSpPr>
-          <p:spPr>
-            <a:xfrm>
-              <a:off x="315545" y="3583279"/>
-              <a:ext cx="2133600" cy="369332"/>
-            </a:xfrm>
-            <a:prstGeom prst="rect">
-              <a:avLst/>
-            </a:prstGeom>
-            <a:noFill/>
-          </p:spPr>
-          <p:txBody>
-            <a:bodyPr wrap="square" rtlCol="0">
-              <a:spAutoFit/>
-            </a:bodyPr>
-            <a:lstStyle/>
-            <a:p>
-              <a:r>
-                <a:rPr lang="en-US" dirty="0" smtClean="0">
-                  <a:solidFill>
-                    <a:schemeClr val="accent2">
-                      <a:lumMod val="75000"/>
-                    </a:schemeClr>
-                  </a:solidFill>
-                </a:rPr>
-                <a:t>shared pointer: lm0</a:t>
               </a:r>
             </a:p>
           </p:txBody>
@@ -12091,26 +12237,33 @@
                     </a:schemeClr>
                   </a:solidFill>
                 </a:rPr>
-                <a:t>d0</a:t>
-              </a:r>
+                <a:t>info</a:t>
+              </a:r>
+              <a:endParaRPr lang="en-US" dirty="0" smtClean="0">
+                <a:solidFill>
+                  <a:schemeClr val="accent2">
+                    <a:lumMod val="75000"/>
+                  </a:schemeClr>
+                </a:solidFill>
+              </a:endParaRPr>
             </a:p>
           </p:txBody>
         </p:sp>
         <p:cxnSp>
           <p:nvCxnSpPr>
             <p:cNvPr id="36" name="Elbow Connector 35"/>
-            <p:cNvCxnSpPr>
-              <a:endCxn id="33" idx="2"/>
-            </p:cNvCxnSpPr>
+            <p:cNvCxnSpPr/>
             <p:nvPr/>
           </p:nvCxnSpPr>
           <p:spPr>
             <a:xfrm flipV="1">
-              <a:off x="5248817" y="2275351"/>
-              <a:ext cx="4209132" cy="1153649"/>
+              <a:off x="5282986" y="2275352"/>
+              <a:ext cx="4283707" cy="1153648"/>
             </a:xfrm>
-            <a:prstGeom prst="bentConnector2">
-              <a:avLst/>
+            <a:prstGeom prst="bentConnector3">
+              <a:avLst>
+                <a:gd name="adj1" fmla="val 99942"/>
+              </a:avLst>
             </a:prstGeom>
             <a:ln w="15875">
               <a:solidFill>
@@ -12144,8 +12297,8 @@
           </p:nvSpPr>
           <p:spPr>
             <a:xfrm>
-              <a:off x="5456337" y="3070160"/>
-              <a:ext cx="3813464" cy="369332"/>
+              <a:off x="5365738" y="3070160"/>
+              <a:ext cx="4200955" cy="338554"/>
             </a:xfrm>
             <a:prstGeom prst="rect">
               <a:avLst/>
@@ -12159,35 +12312,82 @@
             <a:lstStyle/>
             <a:p>
               <a:r>
-                <a:rPr lang="en-US" dirty="0">
+                <a:rPr lang="en-US" sz="1600" dirty="0" smtClean="0">
                   <a:solidFill>
                     <a:schemeClr val="accent2">
                       <a:lumMod val="75000"/>
                     </a:schemeClr>
                   </a:solidFill>
                 </a:rPr>
-                <a:t>d0-&gt;</a:t>
-              </a:r>
-              <a:r>
-                <a:rPr lang="en-US" dirty="0" err="1">
+                <a:t>info</a:t>
+              </a:r>
+              <a:r>
+                <a:rPr lang="en-US" sz="1600" dirty="0" smtClean="0">
                   <a:solidFill>
                     <a:schemeClr val="accent2">
                       <a:lumMod val="75000"/>
                     </a:schemeClr>
                   </a:solidFill>
                 </a:rPr>
-                <a:t>maturity_models</a:t>
-              </a:r>
-              <a:r>
-                <a:rPr lang="en-US" dirty="0">
+                <a:t>-&gt;</a:t>
+              </a:r>
+              <a:r>
+                <a:rPr lang="en-US" sz="1600" dirty="0" err="1" smtClean="0">
                   <a:solidFill>
                     <a:schemeClr val="accent2">
                       <a:lumMod val="75000"/>
                     </a:schemeClr>
                   </a:solidFill>
                 </a:rPr>
-                <a:t>[lm0-&gt;id] = lm0;</a:t>
-              </a:r>
+                <a:t>maturity_models</a:t>
+              </a:r>
+              <a:r>
+                <a:rPr lang="en-US" sz="1600" dirty="0" smtClean="0">
+                  <a:solidFill>
+                    <a:schemeClr val="accent2">
+                      <a:lumMod val="75000"/>
+                    </a:schemeClr>
+                  </a:solidFill>
+                </a:rPr>
+                <a:t>[maturity-</a:t>
+              </a:r>
+              <a:r>
+                <a:rPr lang="en-US" sz="1600" dirty="0">
+                  <a:solidFill>
+                    <a:schemeClr val="accent2">
+                      <a:lumMod val="75000"/>
+                    </a:schemeClr>
+                  </a:solidFill>
+                </a:rPr>
+                <a:t>&gt;id] = </a:t>
+              </a:r>
+              <a:r>
+                <a:rPr lang="en-US" sz="1600" dirty="0" smtClean="0">
+                  <a:solidFill>
+                    <a:schemeClr val="accent2">
+                      <a:lumMod val="75000"/>
+                    </a:schemeClr>
+                  </a:solidFill>
+                </a:rPr>
+                <a:t>maturity</a:t>
+              </a:r>
+              <a:r>
+                <a:rPr lang="en-US" sz="1600" dirty="0" smtClean="0">
+                  <a:solidFill>
+                    <a:schemeClr val="accent2">
+                      <a:lumMod val="75000"/>
+                    </a:schemeClr>
+                  </a:solidFill>
+                </a:rPr>
+                <a:t>;</a:t>
+              </a:r>
+              <a:endParaRPr lang="en-US" sz="1600" dirty="0">
+                <a:solidFill>
+                  <a:schemeClr val="accent2">
+                    <a:lumMod val="75000"/>
+                  </a:schemeClr>
+                </a:solidFill>
+              </a:endParaRPr>
             </a:p>
           </p:txBody>
         </p:sp>
@@ -12300,6 +12500,262 @@
           </p:txBody>
         </p:sp>
       </p:grpSp>
+      <p:sp>
+        <p:nvSpPr>
+          <p:cNvPr id="41" name="Rectangle 40"/>
+          <p:cNvSpPr/>
+          <p:nvPr/>
+        </p:nvSpPr>
+        <p:spPr>
+          <a:xfrm>
+            <a:off x="245917" y="723900"/>
+            <a:ext cx="1220045" cy="1028700"/>
+          </a:xfrm>
+          <a:prstGeom prst="rect">
+            <a:avLst/>
+          </a:prstGeom>
+          <a:solidFill>
+            <a:schemeClr val="accent1">
+              <a:lumMod val="20000"/>
+              <a:lumOff val="80000"/>
+            </a:schemeClr>
+          </a:solidFill>
+          <a:ln>
+            <a:solidFill>
+              <a:schemeClr val="accent1">
+                <a:lumMod val="50000"/>
+              </a:schemeClr>
+            </a:solidFill>
+          </a:ln>
+        </p:spPr>
+        <p:style>
+          <a:lnRef idx="2">
+            <a:schemeClr val="accent1">
+              <a:shade val="50000"/>
+            </a:schemeClr>
+          </a:lnRef>
+          <a:fillRef idx="1">
+            <a:schemeClr val="accent1"/>
+          </a:fillRef>
+          <a:effectRef idx="0">
+            <a:schemeClr val="accent1"/>
+          </a:effectRef>
+          <a:fontRef idx="minor">
+            <a:schemeClr val="lt1"/>
+          </a:fontRef>
+        </p:style>
+        <p:txBody>
+          <a:bodyPr rtlCol="0" anchor="ctr"/>
+          <a:lstStyle/>
+          <a:p>
+            <a:r>
+              <a:rPr lang="en-US" b="1" dirty="0" smtClean="0">
+                <a:solidFill>
+                  <a:schemeClr val="accent1">
+                    <a:lumMod val="50000"/>
+                  </a:schemeClr>
+                </a:solidFill>
+              </a:rPr>
+              <a:t>maturity</a:t>
+            </a:r>
+            <a:endParaRPr lang="en-US" b="1" dirty="0" smtClean="0">
+              <a:solidFill>
+                <a:schemeClr val="accent1">
+                  <a:lumMod val="50000"/>
+                </a:schemeClr>
+              </a:solidFill>
+            </a:endParaRPr>
+          </a:p>
+          <a:p>
+            <a:pPr marL="285750" indent="-285750">
+              <a:buFont typeface="Arial" panose="020B0604020202020204" pitchFamily="34" charset="0"/>
+              <a:buChar char="•"/>
+            </a:pPr>
+            <a:r>
+              <a:rPr lang="en-US" dirty="0" smtClean="0">
+                <a:solidFill>
+                  <a:schemeClr val="accent1">
+                    <a:lumMod val="50000"/>
+                  </a:schemeClr>
+                </a:solidFill>
+              </a:rPr>
+              <a:t>median</a:t>
+            </a:r>
+          </a:p>
+          <a:p>
+            <a:pPr marL="285750" indent="-285750">
+              <a:buFont typeface="Arial" panose="020B0604020202020204" pitchFamily="34" charset="0"/>
+              <a:buChar char="•"/>
+            </a:pPr>
+            <a:r>
+              <a:rPr lang="en-US" dirty="0" smtClean="0">
+                <a:solidFill>
+                  <a:schemeClr val="accent1">
+                    <a:lumMod val="50000"/>
+                  </a:schemeClr>
+                </a:solidFill>
+              </a:rPr>
+              <a:t>slope</a:t>
+            </a:r>
+            <a:endParaRPr lang="en-US" dirty="0">
+              <a:solidFill>
+                <a:schemeClr val="accent1">
+                  <a:lumMod val="50000"/>
+                </a:schemeClr>
+              </a:solidFill>
+            </a:endParaRPr>
+          </a:p>
+        </p:txBody>
+      </p:sp>
+      <p:cxnSp>
+        <p:nvCxnSpPr>
+          <p:cNvPr id="42" name="Straight Arrow Connector 41"/>
+          <p:cNvCxnSpPr>
+            <a:stCxn id="41" idx="3"/>
+          </p:cNvCxnSpPr>
+          <p:nvPr/>
+        </p:nvCxnSpPr>
+        <p:spPr>
+          <a:xfrm>
+            <a:off x="1465962" y="1238250"/>
+            <a:ext cx="1195589" cy="0"/>
+          </a:xfrm>
+          <a:prstGeom prst="straightConnector1">
+            <a:avLst/>
+          </a:prstGeom>
+          <a:ln w="15875">
+            <a:tailEnd type="triangle"/>
+          </a:ln>
+        </p:spPr>
+        <p:style>
+          <a:lnRef idx="1">
+            <a:schemeClr val="accent1"/>
+          </a:lnRef>
+          <a:fillRef idx="0">
+            <a:schemeClr val="accent1"/>
+          </a:fillRef>
+          <a:effectRef idx="0">
+            <a:schemeClr val="accent1"/>
+          </a:effectRef>
+          <a:fontRef idx="minor">
+            <a:schemeClr val="tx1"/>
+          </a:fontRef>
+        </p:style>
+      </p:cxnSp>
+      <p:sp>
+        <p:nvSpPr>
+          <p:cNvPr id="43" name="TextBox 42"/>
+          <p:cNvSpPr txBox="1"/>
+          <p:nvPr/>
+        </p:nvSpPr>
+        <p:spPr>
+          <a:xfrm>
+            <a:off x="1405580" y="944268"/>
+            <a:ext cx="1443753" cy="307777"/>
+          </a:xfrm>
+          <a:prstGeom prst="rect">
+            <a:avLst/>
+          </a:prstGeom>
+          <a:noFill/>
+        </p:spPr>
+        <p:txBody>
+          <a:bodyPr wrap="square" rtlCol="0">
+            <a:spAutoFit/>
+          </a:bodyPr>
+          <a:lstStyle/>
+          <a:p>
+            <a:r>
+              <a:rPr lang="en-US" sz="1400" dirty="0">
+                <a:solidFill>
+                  <a:schemeClr val="accent1">
+                    <a:lumMod val="50000"/>
+                  </a:schemeClr>
+                </a:solidFill>
+              </a:rPr>
+              <a:t>m</a:t>
+            </a:r>
+            <a:r>
+              <a:rPr lang="en-US" sz="1400" dirty="0" smtClean="0">
+                <a:solidFill>
+                  <a:schemeClr val="accent1">
+                    <a:lumMod val="50000"/>
+                  </a:schemeClr>
+                </a:solidFill>
+              </a:rPr>
+              <a:t>ethods::new</a:t>
+            </a:r>
+            <a:r>
+              <a:rPr lang="en-US" sz="1400" dirty="0" smtClean="0">
+                <a:solidFill>
+                  <a:schemeClr val="accent1">
+                    <a:lumMod val="50000"/>
+                  </a:schemeClr>
+                </a:solidFill>
+              </a:rPr>
+              <a:t>()</a:t>
+            </a:r>
+            <a:endParaRPr lang="en-US" sz="1400" dirty="0">
+              <a:solidFill>
+                <a:schemeClr val="accent1">
+                  <a:lumMod val="50000"/>
+                </a:schemeClr>
+              </a:solidFill>
+            </a:endParaRPr>
+          </a:p>
+        </p:txBody>
+      </p:sp>
+      <p:sp>
+        <p:nvSpPr>
+          <p:cNvPr id="46" name="TextBox 45"/>
+          <p:cNvSpPr txBox="1"/>
+          <p:nvPr/>
+        </p:nvSpPr>
+        <p:spPr>
+          <a:xfrm>
+            <a:off x="630323" y="3471935"/>
+            <a:ext cx="1792926" cy="646331"/>
+          </a:xfrm>
+          <a:prstGeom prst="rect">
+            <a:avLst/>
+          </a:prstGeom>
+          <a:noFill/>
+        </p:spPr>
+        <p:txBody>
+          <a:bodyPr wrap="square" rtlCol="0">
+            <a:spAutoFit/>
+          </a:bodyPr>
+          <a:lstStyle/>
+          <a:p>
+            <a:r>
+              <a:rPr lang="en-US" dirty="0" smtClean="0">
+                <a:solidFill>
+                  <a:schemeClr val="accent2">
+                    <a:lumMod val="75000"/>
+                  </a:schemeClr>
+                </a:solidFill>
+              </a:rPr>
+              <a:t>shared pointer: </a:t>
+            </a:r>
+            <a:r>
+              <a:rPr lang="en-US" dirty="0" smtClean="0">
+                <a:solidFill>
+                  <a:schemeClr val="accent2">
+                    <a:lumMod val="75000"/>
+                  </a:schemeClr>
+                </a:solidFill>
+              </a:rPr>
+              <a:t>maturity</a:t>
+            </a:r>
+            <a:endParaRPr lang="en-US" dirty="0" smtClean="0">
+              <a:solidFill>
+                <a:schemeClr val="accent2">
+                  <a:lumMod val="75000"/>
+                </a:schemeClr>
+              </a:solidFill>
+            </a:endParaRPr>
+          </a:p>
+        </p:txBody>
+      </p:sp>
     </p:spTree>
     <p:extLst>
       <p:ext uri="{BB962C8B-B14F-4D97-AF65-F5344CB8AC3E}">
@@ -12346,113 +12802,6 @@
         </p:grpSpPr>
         <p:sp>
           <p:nvSpPr>
-            <p:cNvPr id="4" name="Rectangle 3"/>
-            <p:cNvSpPr/>
-            <p:nvPr/>
-          </p:nvSpPr>
-          <p:spPr>
-            <a:xfrm>
-              <a:off x="245917" y="723900"/>
-              <a:ext cx="1619250" cy="1028700"/>
-            </a:xfrm>
-            <a:prstGeom prst="rect">
-              <a:avLst/>
-            </a:prstGeom>
-            <a:solidFill>
-              <a:schemeClr val="accent1">
-                <a:lumMod val="20000"/>
-                <a:lumOff val="80000"/>
-              </a:schemeClr>
-            </a:solidFill>
-            <a:ln>
-              <a:solidFill>
-                <a:schemeClr val="accent1">
-                  <a:lumMod val="50000"/>
-                </a:schemeClr>
-              </a:solidFill>
-            </a:ln>
-          </p:spPr>
-          <p:style>
-            <a:lnRef idx="2">
-              <a:schemeClr val="accent1">
-                <a:shade val="50000"/>
-              </a:schemeClr>
-            </a:lnRef>
-            <a:fillRef idx="1">
-              <a:schemeClr val="accent1"/>
-            </a:fillRef>
-            <a:effectRef idx="0">
-              <a:schemeClr val="accent1"/>
-            </a:effectRef>
-            <a:fontRef idx="minor">
-              <a:schemeClr val="lt1"/>
-            </a:fontRef>
-          </p:style>
-          <p:txBody>
-            <a:bodyPr rtlCol="0" anchor="ctr"/>
-            <a:lstStyle/>
-            <a:p>
-              <a:r>
-                <a:rPr lang="en-US" b="1" dirty="0" err="1" smtClean="0">
-                  <a:solidFill>
-                    <a:schemeClr val="accent1">
-                      <a:lumMod val="50000"/>
-                    </a:schemeClr>
-                  </a:solidFill>
-                </a:rPr>
-                <a:t>fims$maturity</a:t>
-              </a:r>
-              <a:endParaRPr lang="en-US" b="1" dirty="0" smtClean="0">
-                <a:solidFill>
-                  <a:schemeClr val="accent1">
-                    <a:lumMod val="50000"/>
-                  </a:schemeClr>
-                </a:solidFill>
-              </a:endParaRPr>
-            </a:p>
-            <a:p>
-              <a:pPr marL="285750" indent="-285750">
-                <a:buFont typeface="Arial" panose="020B0604020202020204" pitchFamily="34" charset="0"/>
-                <a:buChar char="•"/>
-              </a:pPr>
-              <a:r>
-                <a:rPr lang="en-US" dirty="0" smtClean="0">
-                  <a:solidFill>
-                    <a:schemeClr val="accent1">
-                      <a:lumMod val="50000"/>
-                    </a:schemeClr>
-                  </a:solidFill>
-                </a:rPr>
-                <a:t>median</a:t>
-              </a:r>
-            </a:p>
-            <a:p>
-              <a:pPr marL="285750" indent="-285750">
-                <a:buFont typeface="Arial" panose="020B0604020202020204" pitchFamily="34" charset="0"/>
-                <a:buChar char="•"/>
-              </a:pPr>
-              <a:r>
-                <a:rPr lang="en-US" dirty="0" smtClean="0">
-                  <a:solidFill>
-                    <a:schemeClr val="accent1">
-                      <a:lumMod val="50000"/>
-                    </a:schemeClr>
-                  </a:solidFill>
-                </a:rPr>
-                <a:t>slope</a:t>
-              </a:r>
-              <a:endParaRPr lang="en-US" dirty="0">
-                <a:solidFill>
-                  <a:schemeClr val="accent1">
-                    <a:lumMod val="50000"/>
-                  </a:schemeClr>
-                </a:solidFill>
-              </a:endParaRPr>
-            </a:p>
-          </p:txBody>
-        </p:sp>
-        <p:sp>
-          <p:nvSpPr>
             <p:cNvPr id="6" name="Rectangle 5"/>
             <p:cNvSpPr/>
             <p:nvPr/>
@@ -12507,7 +12856,7 @@
                     </a:schemeClr>
                   </a:solidFill>
                 </a:rPr>
-                <a:t>fims$LogisticMaturity</a:t>
+                <a:t>LogisticMaturity</a:t>
               </a:r>
               <a:endParaRPr lang="en-US" b="1" dirty="0" smtClean="0">
                 <a:solidFill>
@@ -12701,10 +13050,17 @@
                 </a:rPr>
                 <a:t>(</a:t>
               </a:r>
-            </a:p>
-            <a:p>
-              <a:r>
-                <a:rPr lang="en-US" dirty="0">
+              <a:endParaRPr lang="en-US" sz="1400" dirty="0" smtClean="0">
+                <a:solidFill>
+                  <a:schemeClr val="accent2">
+                    <a:lumMod val="75000"/>
+                  </a:schemeClr>
+                </a:solidFill>
+              </a:endParaRPr>
+            </a:p>
+            <a:p>
+              <a:r>
+                <a:rPr lang="en-US" sz="1400" dirty="0">
                   <a:solidFill>
                     <a:schemeClr val="accent2">
                       <a:lumMod val="75000"/>
@@ -12714,129 +13070,78 @@
                 <a:t> </a:t>
               </a:r>
               <a:r>
-                <a:rPr lang="en-US" dirty="0" smtClean="0">
+                <a:rPr lang="en-US" sz="1400" dirty="0" smtClean="0">
                   <a:solidFill>
                     <a:schemeClr val="accent2">
                       <a:lumMod val="75000"/>
                     </a:schemeClr>
                   </a:solidFill>
                 </a:rPr>
-                <a:t>       shared pointer: lm0</a:t>
-              </a:r>
-            </a:p>
-            <a:p>
-              <a:r>
-                <a:rPr lang="en-US" dirty="0">
+                <a:t>       shared pointer: </a:t>
+              </a:r>
+              <a:r>
+                <a:rPr lang="en-US" sz="1400" dirty="0" smtClean="0">
                   <a:solidFill>
                     <a:schemeClr val="accent2">
                       <a:lumMod val="75000"/>
                     </a:schemeClr>
                   </a:solidFill>
                 </a:rPr>
-                <a:t> </a:t>
-              </a:r>
-              <a:r>
-                <a:rPr lang="en-US" dirty="0" smtClean="0">
+                <a:t>maturity</a:t>
+              </a:r>
+              <a:endParaRPr lang="en-US" sz="1400" dirty="0" smtClean="0">
+                <a:solidFill>
+                  <a:schemeClr val="accent2">
+                    <a:lumMod val="75000"/>
+                  </a:schemeClr>
+                </a:solidFill>
+              </a:endParaRPr>
+            </a:p>
+            <a:p>
+              <a:r>
+                <a:rPr lang="en-US" sz="1400" dirty="0">
                   <a:solidFill>
                     <a:schemeClr val="accent2">
                       <a:lumMod val="75000"/>
                     </a:schemeClr>
                   </a:solidFill>
                 </a:rPr>
-                <a:t>       shared pointer: </a:t>
-              </a:r>
-              <a:r>
-                <a:rPr lang="en-US" dirty="0" smtClean="0">
+                <a:t> </a:t>
+              </a:r>
+              <a:r>
+                <a:rPr lang="en-US" sz="1400" dirty="0" smtClean="0">
                   <a:solidFill>
                     <a:schemeClr val="accent2">
                       <a:lumMod val="75000"/>
                     </a:schemeClr>
                   </a:solidFill>
                 </a:rPr>
-                <a:t>d0)</a:t>
+                <a:t>       shared pointer: </a:t>
+              </a:r>
+              <a:r>
+                <a:rPr lang="en-US" sz="1400" dirty="0" smtClean="0">
+                  <a:solidFill>
+                    <a:schemeClr val="accent2">
+                      <a:lumMod val="75000"/>
+                    </a:schemeClr>
+                  </a:solidFill>
+                </a:rPr>
+                <a:t>info</a:t>
+              </a:r>
+              <a:r>
+                <a:rPr lang="en-US" dirty="0" smtClean="0">
+                  <a:solidFill>
+                    <a:schemeClr val="accent2">
+                      <a:lumMod val="75000"/>
+                    </a:schemeClr>
+                  </a:solidFill>
+                </a:rPr>
+                <a:t>)</a:t>
               </a:r>
               <a:endParaRPr lang="en-US" dirty="0" smtClean="0">
                 <a:solidFill>
                   <a:schemeClr val="accent2">
                     <a:lumMod val="75000"/>
-                  </a:schemeClr>
-                </a:solidFill>
-              </a:endParaRPr>
-            </a:p>
-          </p:txBody>
-        </p:sp>
-        <p:cxnSp>
-          <p:nvCxnSpPr>
-            <p:cNvPr id="12" name="Straight Arrow Connector 11"/>
-            <p:cNvCxnSpPr>
-              <a:stCxn id="4" idx="3"/>
-              <a:endCxn id="6" idx="1"/>
-            </p:cNvCxnSpPr>
-            <p:nvPr/>
-          </p:nvCxnSpPr>
-          <p:spPr>
-            <a:xfrm>
-              <a:off x="1865167" y="1238250"/>
-              <a:ext cx="796385" cy="0"/>
-            </a:xfrm>
-            <a:prstGeom prst="straightConnector1">
-              <a:avLst/>
-            </a:prstGeom>
-            <a:ln w="15875">
-              <a:tailEnd type="triangle"/>
-            </a:ln>
-          </p:spPr>
-          <p:style>
-            <a:lnRef idx="1">
-              <a:schemeClr val="accent1"/>
-            </a:lnRef>
-            <a:fillRef idx="0">
-              <a:schemeClr val="accent1"/>
-            </a:fillRef>
-            <a:effectRef idx="0">
-              <a:schemeClr val="accent1"/>
-            </a:effectRef>
-            <a:fontRef idx="minor">
-              <a:schemeClr val="tx1"/>
-            </a:fontRef>
-          </p:style>
-        </p:cxnSp>
-        <p:sp>
-          <p:nvSpPr>
-            <p:cNvPr id="15" name="TextBox 14"/>
-            <p:cNvSpPr txBox="1"/>
-            <p:nvPr/>
-          </p:nvSpPr>
-          <p:spPr>
-            <a:xfrm>
-              <a:off x="1865167" y="876300"/>
-              <a:ext cx="781050" cy="369332"/>
-            </a:xfrm>
-            <a:prstGeom prst="rect">
-              <a:avLst/>
-            </a:prstGeom>
-            <a:noFill/>
-          </p:spPr>
-          <p:txBody>
-            <a:bodyPr wrap="square" rtlCol="0">
-              <a:spAutoFit/>
-            </a:bodyPr>
-            <a:lstStyle/>
-            <a:p>
-              <a:r>
-                <a:rPr lang="en-US" dirty="0" smtClean="0">
-                  <a:solidFill>
-                    <a:schemeClr val="accent1">
-                      <a:lumMod val="50000"/>
-                    </a:schemeClr>
-                  </a:solidFill>
-                </a:rPr>
-                <a:t>new()</a:t>
-              </a:r>
-              <a:endParaRPr lang="en-US" dirty="0">
-                <a:solidFill>
-                  <a:schemeClr val="accent1">
-                    <a:lumMod val="50000"/>
                   </a:schemeClr>
                 </a:solidFill>
               </a:endParaRPr>
@@ -13090,41 +13395,6 @@
                   </a:solidFill>
                 </a:rPr>
                 <a:t>evaluate(x)</a:t>
-              </a:r>
-            </a:p>
-          </p:txBody>
-        </p:sp>
-        <p:sp>
-          <p:nvSpPr>
-            <p:cNvPr id="24" name="TextBox 23"/>
-            <p:cNvSpPr txBox="1"/>
-            <p:nvPr/>
-          </p:nvSpPr>
-          <p:spPr>
-            <a:xfrm>
-              <a:off x="315545" y="3583279"/>
-              <a:ext cx="2133600" cy="369332"/>
-            </a:xfrm>
-            <a:prstGeom prst="rect">
-              <a:avLst/>
-            </a:prstGeom>
-            <a:noFill/>
-          </p:spPr>
-          <p:txBody>
-            <a:bodyPr wrap="square" rtlCol="0">
-              <a:spAutoFit/>
-            </a:bodyPr>
-            <a:lstStyle/>
-            <a:p>
-              <a:r>
-                <a:rPr lang="en-US" dirty="0" smtClean="0">
-                  <a:solidFill>
-                    <a:schemeClr val="accent2">
-                      <a:lumMod val="75000"/>
-                    </a:schemeClr>
-                  </a:solidFill>
-                </a:rPr>
-                <a:t>shared pointer: lm0</a:t>
               </a:r>
             </a:p>
           </p:txBody>
@@ -14128,103 +14398,15 @@
                     </a:schemeClr>
                   </a:solidFill>
                 </a:rPr>
-                <a:t>d0</a:t>
-              </a:r>
-            </a:p>
-          </p:txBody>
-        </p:sp>
-        <p:cxnSp>
-          <p:nvCxnSpPr>
-            <p:cNvPr id="36" name="Elbow Connector 35"/>
-            <p:cNvCxnSpPr>
-              <a:endCxn id="33" idx="2"/>
-            </p:cNvCxnSpPr>
-            <p:nvPr/>
-          </p:nvCxnSpPr>
-          <p:spPr>
-            <a:xfrm flipV="1">
-              <a:off x="5248817" y="2275351"/>
-              <a:ext cx="4209132" cy="1153649"/>
-            </a:xfrm>
-            <a:prstGeom prst="bentConnector2">
-              <a:avLst/>
-            </a:prstGeom>
-            <a:ln w="15875">
-              <a:solidFill>
-                <a:schemeClr val="accent2">
-                  <a:lumMod val="75000"/>
-                </a:schemeClr>
-              </a:solidFill>
-              <a:tailEnd type="triangle"/>
-            </a:ln>
-          </p:spPr>
-          <p:style>
-            <a:lnRef idx="1">
-              <a:schemeClr val="dk1"/>
-            </a:lnRef>
-            <a:fillRef idx="0">
-              <a:schemeClr val="dk1"/>
-            </a:fillRef>
-            <a:effectRef idx="0">
-              <a:schemeClr val="dk1"/>
-            </a:effectRef>
-            <a:fontRef idx="minor">
-              <a:schemeClr val="tx1"/>
-            </a:fontRef>
-          </p:style>
-        </p:cxnSp>
-        <p:sp>
-          <p:nvSpPr>
-            <p:cNvPr id="38" name="TextBox 37"/>
-            <p:cNvSpPr txBox="1"/>
-            <p:nvPr/>
-          </p:nvSpPr>
-          <p:spPr>
-            <a:xfrm>
-              <a:off x="5456337" y="3070160"/>
-              <a:ext cx="3813464" cy="369332"/>
-            </a:xfrm>
-            <a:prstGeom prst="rect">
-              <a:avLst/>
-            </a:prstGeom>
-            <a:noFill/>
-          </p:spPr>
-          <p:txBody>
-            <a:bodyPr wrap="square" rtlCol="0">
-              <a:spAutoFit/>
-            </a:bodyPr>
-            <a:lstStyle/>
-            <a:p>
-              <a:r>
-                <a:rPr lang="en-US" dirty="0">
-                  <a:solidFill>
-                    <a:schemeClr val="accent2">
-                      <a:lumMod val="75000"/>
-                    </a:schemeClr>
-                  </a:solidFill>
-                </a:rPr>
-                <a:t>d0-&gt;</a:t>
-              </a:r>
-              <a:r>
-                <a:rPr lang="en-US" dirty="0" err="1">
-                  <a:solidFill>
-                    <a:schemeClr val="accent2">
-                      <a:lumMod val="75000"/>
-                    </a:schemeClr>
-                  </a:solidFill>
-                </a:rPr>
-                <a:t>maturity_models</a:t>
-              </a:r>
-              <a:r>
-                <a:rPr lang="en-US" dirty="0">
-                  <a:solidFill>
-                    <a:schemeClr val="accent2">
-                      <a:lumMod val="75000"/>
-                    </a:schemeClr>
-                  </a:solidFill>
-                </a:rPr>
-                <a:t>[lm0-&gt;id] = lm0;</a:t>
-              </a:r>
+                <a:t>info</a:t>
+              </a:r>
+              <a:endParaRPr lang="en-US" dirty="0" smtClean="0">
+                <a:solidFill>
+                  <a:schemeClr val="accent2">
+                    <a:lumMod val="75000"/>
+                  </a:schemeClr>
+                </a:solidFill>
+              </a:endParaRPr>
             </a:p>
           </p:txBody>
         </p:sp>
@@ -14405,46 +14587,16 @@
           </p:txBody>
         </p:sp>
       </p:grpSp>
-    </p:spTree>
-    <p:extLst>
-      <p:ext uri="{BB962C8B-B14F-4D97-AF65-F5344CB8AC3E}">
-        <p14:creationId xmlns:p14="http://schemas.microsoft.com/office/powerpoint/2010/main" val="1310769892"/>
-      </p:ext>
-    </p:extLst>
-  </p:cSld>
-  <p:clrMapOvr>
-    <a:masterClrMapping/>
-  </p:clrMapOvr>
-</p:sld>
-</file>
-
-<file path=ppt/slides/slide8.xml><?xml version="1.0" encoding="utf-8"?>
-<p:sld xmlns:a="http://schemas.openxmlformats.org/drawingml/2006/main" xmlns:r="http://schemas.openxmlformats.org/officeDocument/2006/relationships" xmlns:p="http://schemas.openxmlformats.org/presentationml/2006/main">
-  <p:cSld>
-    <p:spTree>
-      <p:nvGrpSpPr>
-        <p:cNvPr id="1" name=""/>
-        <p:cNvGrpSpPr/>
-        <p:nvPr/>
-      </p:nvGrpSpPr>
-      <p:grpSpPr>
-        <a:xfrm>
-          <a:off x="0" y="0"/>
-          <a:ext cx="0" cy="0"/>
-          <a:chOff x="0" y="0"/>
-          <a:chExt cx="0" cy="0"/>
-        </a:xfrm>
-      </p:grpSpPr>
       <p:sp>
         <p:nvSpPr>
-          <p:cNvPr id="4" name="Rectangle 3"/>
+          <p:cNvPr id="41" name="Rectangle 40"/>
           <p:cNvSpPr/>
           <p:nvPr/>
         </p:nvSpPr>
         <p:spPr>
           <a:xfrm>
             <a:off x="245917" y="723900"/>
-            <a:ext cx="1619250" cy="1028700"/>
+            <a:ext cx="1220045" cy="1028700"/>
           </a:xfrm>
           <a:prstGeom prst="rect">
             <a:avLst/>
@@ -14484,14 +14636,14 @@
           <a:lstStyle/>
           <a:p>
             <a:r>
-              <a:rPr lang="en-US" b="1" dirty="0" err="1" smtClean="0">
+              <a:rPr lang="en-US" b="1" dirty="0" smtClean="0">
                 <a:solidFill>
                   <a:schemeClr val="accent1">
                     <a:lumMod val="50000"/>
                   </a:schemeClr>
                 </a:solidFill>
               </a:rPr>
-              <a:t>fims$maturity</a:t>
+              <a:t>maturity</a:t>
             </a:r>
             <a:endParaRPr lang="en-US" b="1" dirty="0" smtClean="0">
               <a:solidFill>
@@ -14542,6 +14694,327 @@
           </a:p>
         </p:txBody>
       </p:sp>
+      <p:cxnSp>
+        <p:nvCxnSpPr>
+          <p:cNvPr id="42" name="Straight Arrow Connector 41"/>
+          <p:cNvCxnSpPr>
+            <a:stCxn id="41" idx="3"/>
+          </p:cNvCxnSpPr>
+          <p:nvPr/>
+        </p:nvCxnSpPr>
+        <p:spPr>
+          <a:xfrm>
+            <a:off x="1465962" y="1238250"/>
+            <a:ext cx="1195589" cy="0"/>
+          </a:xfrm>
+          <a:prstGeom prst="straightConnector1">
+            <a:avLst/>
+          </a:prstGeom>
+          <a:ln w="15875">
+            <a:tailEnd type="triangle"/>
+          </a:ln>
+        </p:spPr>
+        <p:style>
+          <a:lnRef idx="1">
+            <a:schemeClr val="accent1"/>
+          </a:lnRef>
+          <a:fillRef idx="0">
+            <a:schemeClr val="accent1"/>
+          </a:fillRef>
+          <a:effectRef idx="0">
+            <a:schemeClr val="accent1"/>
+          </a:effectRef>
+          <a:fontRef idx="minor">
+            <a:schemeClr val="tx1"/>
+          </a:fontRef>
+        </p:style>
+      </p:cxnSp>
+      <p:sp>
+        <p:nvSpPr>
+          <p:cNvPr id="43" name="TextBox 42"/>
+          <p:cNvSpPr txBox="1"/>
+          <p:nvPr/>
+        </p:nvSpPr>
+        <p:spPr>
+          <a:xfrm>
+            <a:off x="1405580" y="944268"/>
+            <a:ext cx="1443753" cy="307777"/>
+          </a:xfrm>
+          <a:prstGeom prst="rect">
+            <a:avLst/>
+          </a:prstGeom>
+          <a:noFill/>
+        </p:spPr>
+        <p:txBody>
+          <a:bodyPr wrap="square" rtlCol="0">
+            <a:spAutoFit/>
+          </a:bodyPr>
+          <a:lstStyle/>
+          <a:p>
+            <a:r>
+              <a:rPr lang="en-US" sz="1400" dirty="0">
+                <a:solidFill>
+                  <a:schemeClr val="accent1">
+                    <a:lumMod val="50000"/>
+                  </a:schemeClr>
+                </a:solidFill>
+              </a:rPr>
+              <a:t>m</a:t>
+            </a:r>
+            <a:r>
+              <a:rPr lang="en-US" sz="1400" dirty="0" smtClean="0">
+                <a:solidFill>
+                  <a:schemeClr val="accent1">
+                    <a:lumMod val="50000"/>
+                  </a:schemeClr>
+                </a:solidFill>
+              </a:rPr>
+              <a:t>ethods::new</a:t>
+            </a:r>
+            <a:r>
+              <a:rPr lang="en-US" sz="1400" dirty="0" smtClean="0">
+                <a:solidFill>
+                  <a:schemeClr val="accent1">
+                    <a:lumMod val="50000"/>
+                  </a:schemeClr>
+                </a:solidFill>
+              </a:rPr>
+              <a:t>()</a:t>
+            </a:r>
+            <a:endParaRPr lang="en-US" sz="1400" dirty="0">
+              <a:solidFill>
+                <a:schemeClr val="accent1">
+                  <a:lumMod val="50000"/>
+                </a:schemeClr>
+              </a:solidFill>
+            </a:endParaRPr>
+          </a:p>
+        </p:txBody>
+      </p:sp>
+      <p:sp>
+        <p:nvSpPr>
+          <p:cNvPr id="46" name="TextBox 45"/>
+          <p:cNvSpPr txBox="1"/>
+          <p:nvPr/>
+        </p:nvSpPr>
+        <p:spPr>
+          <a:xfrm>
+            <a:off x="630323" y="3471935"/>
+            <a:ext cx="1792926" cy="646331"/>
+          </a:xfrm>
+          <a:prstGeom prst="rect">
+            <a:avLst/>
+          </a:prstGeom>
+          <a:noFill/>
+        </p:spPr>
+        <p:txBody>
+          <a:bodyPr wrap="square" rtlCol="0">
+            <a:spAutoFit/>
+          </a:bodyPr>
+          <a:lstStyle/>
+          <a:p>
+            <a:r>
+              <a:rPr lang="en-US" dirty="0" smtClean="0">
+                <a:solidFill>
+                  <a:schemeClr val="accent2">
+                    <a:lumMod val="75000"/>
+                  </a:schemeClr>
+                </a:solidFill>
+              </a:rPr>
+              <a:t>shared pointer: </a:t>
+            </a:r>
+            <a:r>
+              <a:rPr lang="en-US" dirty="0" smtClean="0">
+                <a:solidFill>
+                  <a:schemeClr val="accent2">
+                    <a:lumMod val="75000"/>
+                  </a:schemeClr>
+                </a:solidFill>
+              </a:rPr>
+              <a:t>maturity</a:t>
+            </a:r>
+            <a:endParaRPr lang="en-US" dirty="0" smtClean="0">
+              <a:solidFill>
+                <a:schemeClr val="accent2">
+                  <a:lumMod val="75000"/>
+                </a:schemeClr>
+              </a:solidFill>
+            </a:endParaRPr>
+          </a:p>
+        </p:txBody>
+      </p:sp>
+      <p:cxnSp>
+        <p:nvCxnSpPr>
+          <p:cNvPr id="48" name="Elbow Connector 47"/>
+          <p:cNvCxnSpPr/>
+          <p:nvPr/>
+        </p:nvCxnSpPr>
+        <p:spPr>
+          <a:xfrm flipV="1">
+            <a:off x="5282986" y="2275352"/>
+            <a:ext cx="4283707" cy="1153648"/>
+          </a:xfrm>
+          <a:prstGeom prst="bentConnector3">
+            <a:avLst>
+              <a:gd name="adj1" fmla="val 99942"/>
+            </a:avLst>
+          </a:prstGeom>
+          <a:ln w="15875">
+            <a:solidFill>
+              <a:schemeClr val="accent2">
+                <a:lumMod val="75000"/>
+              </a:schemeClr>
+            </a:solidFill>
+            <a:tailEnd type="triangle"/>
+          </a:ln>
+        </p:spPr>
+        <p:style>
+          <a:lnRef idx="1">
+            <a:schemeClr val="dk1"/>
+          </a:lnRef>
+          <a:fillRef idx="0">
+            <a:schemeClr val="dk1"/>
+          </a:fillRef>
+          <a:effectRef idx="0">
+            <a:schemeClr val="dk1"/>
+          </a:effectRef>
+          <a:fontRef idx="minor">
+            <a:schemeClr val="tx1"/>
+          </a:fontRef>
+        </p:style>
+      </p:cxnSp>
+      <p:sp>
+        <p:nvSpPr>
+          <p:cNvPr id="49" name="TextBox 48"/>
+          <p:cNvSpPr txBox="1"/>
+          <p:nvPr/>
+        </p:nvSpPr>
+        <p:spPr>
+          <a:xfrm>
+            <a:off x="5365738" y="3070160"/>
+            <a:ext cx="4200955" cy="338554"/>
+          </a:xfrm>
+          <a:prstGeom prst="rect">
+            <a:avLst/>
+          </a:prstGeom>
+          <a:noFill/>
+        </p:spPr>
+        <p:txBody>
+          <a:bodyPr wrap="square" rtlCol="0">
+            <a:spAutoFit/>
+          </a:bodyPr>
+          <a:lstStyle/>
+          <a:p>
+            <a:r>
+              <a:rPr lang="en-US" sz="1600" dirty="0" smtClean="0">
+                <a:solidFill>
+                  <a:schemeClr val="accent2">
+                    <a:lumMod val="75000"/>
+                  </a:schemeClr>
+                </a:solidFill>
+              </a:rPr>
+              <a:t>info</a:t>
+            </a:r>
+            <a:r>
+              <a:rPr lang="en-US" sz="1600" dirty="0" smtClean="0">
+                <a:solidFill>
+                  <a:schemeClr val="accent2">
+                    <a:lumMod val="75000"/>
+                  </a:schemeClr>
+                </a:solidFill>
+              </a:rPr>
+              <a:t>-&gt;</a:t>
+            </a:r>
+            <a:r>
+              <a:rPr lang="en-US" sz="1600" dirty="0" err="1" smtClean="0">
+                <a:solidFill>
+                  <a:schemeClr val="accent2">
+                    <a:lumMod val="75000"/>
+                  </a:schemeClr>
+                </a:solidFill>
+              </a:rPr>
+              <a:t>maturity_models</a:t>
+            </a:r>
+            <a:r>
+              <a:rPr lang="en-US" sz="1600" dirty="0" smtClean="0">
+                <a:solidFill>
+                  <a:schemeClr val="accent2">
+                    <a:lumMod val="75000"/>
+                  </a:schemeClr>
+                </a:solidFill>
+              </a:rPr>
+              <a:t>[maturity-</a:t>
+            </a:r>
+            <a:r>
+              <a:rPr lang="en-US" sz="1600" dirty="0">
+                <a:solidFill>
+                  <a:schemeClr val="accent2">
+                    <a:lumMod val="75000"/>
+                  </a:schemeClr>
+                </a:solidFill>
+              </a:rPr>
+              <a:t>&gt;id] = </a:t>
+            </a:r>
+            <a:r>
+              <a:rPr lang="en-US" sz="1600" dirty="0" smtClean="0">
+                <a:solidFill>
+                  <a:schemeClr val="accent2">
+                    <a:lumMod val="75000"/>
+                  </a:schemeClr>
+                </a:solidFill>
+              </a:rPr>
+              <a:t>maturity</a:t>
+            </a:r>
+            <a:r>
+              <a:rPr lang="en-US" sz="1600" dirty="0" smtClean="0">
+                <a:solidFill>
+                  <a:schemeClr val="accent2">
+                    <a:lumMod val="75000"/>
+                  </a:schemeClr>
+                </a:solidFill>
+              </a:rPr>
+              <a:t>;</a:t>
+            </a:r>
+            <a:endParaRPr lang="en-US" sz="1600" dirty="0">
+              <a:solidFill>
+                <a:schemeClr val="accent2">
+                  <a:lumMod val="75000"/>
+                </a:schemeClr>
+              </a:solidFill>
+            </a:endParaRPr>
+          </a:p>
+        </p:txBody>
+      </p:sp>
+    </p:spTree>
+    <p:extLst>
+      <p:ext uri="{BB962C8B-B14F-4D97-AF65-F5344CB8AC3E}">
+        <p14:creationId xmlns:p14="http://schemas.microsoft.com/office/powerpoint/2010/main" val="1310769892"/>
+      </p:ext>
+    </p:extLst>
+  </p:cSld>
+  <p:clrMapOvr>
+    <a:masterClrMapping/>
+  </p:clrMapOvr>
+</p:sld>
+</file>
+
+<file path=ppt/slides/slide8.xml><?xml version="1.0" encoding="utf-8"?>
+<p:sld xmlns:a="http://schemas.openxmlformats.org/drawingml/2006/main" xmlns:r="http://schemas.openxmlformats.org/officeDocument/2006/relationships" xmlns:p="http://schemas.openxmlformats.org/presentationml/2006/main">
+  <p:cSld>
+    <p:spTree>
+      <p:nvGrpSpPr>
+        <p:cNvPr id="1" name=""/>
+        <p:cNvGrpSpPr/>
+        <p:nvPr/>
+      </p:nvGrpSpPr>
+      <p:grpSpPr>
+        <a:xfrm>
+          <a:off x="0" y="0"/>
+          <a:ext cx="0" cy="0"/>
+          <a:chOff x="0" y="0"/>
+          <a:chExt cx="0" cy="0"/>
+        </a:xfrm>
+      </p:grpSpPr>
       <p:sp>
         <p:nvSpPr>
           <p:cNvPr id="6" name="Rectangle 5"/>
@@ -14591,14 +15064,14 @@
           <a:lstStyle/>
           <a:p>
             <a:r>
-              <a:rPr lang="en-US" b="1" dirty="0" err="1" smtClean="0">
+              <a:rPr lang="en-US" b="1" smtClean="0">
                 <a:solidFill>
                   <a:schemeClr val="accent1">
                     <a:lumMod val="50000"/>
                   </a:schemeClr>
                 </a:solidFill>
               </a:rPr>
-              <a:t>fims$LogisticMaturity</a:t>
+              <a:t>LogisticMaturity</a:t>
             </a:r>
             <a:endParaRPr lang="en-US" b="1" dirty="0" smtClean="0">
               <a:solidFill>
@@ -14792,61 +15265,7 @@
               </a:rPr>
               <a:t>(</a:t>
             </a:r>
-          </a:p>
-          <a:p>
-            <a:r>
-              <a:rPr lang="en-US" dirty="0">
-                <a:solidFill>
-                  <a:schemeClr val="accent2">
-                    <a:lumMod val="75000"/>
-                  </a:schemeClr>
-                </a:solidFill>
-              </a:rPr>
-              <a:t> </a:t>
-            </a:r>
-            <a:r>
-              <a:rPr lang="en-US" dirty="0" smtClean="0">
-                <a:solidFill>
-                  <a:schemeClr val="accent2">
-                    <a:lumMod val="75000"/>
-                  </a:schemeClr>
-                </a:solidFill>
-              </a:rPr>
-              <a:t>       shared pointer: lm0</a:t>
-            </a:r>
-          </a:p>
-          <a:p>
-            <a:r>
-              <a:rPr lang="en-US" dirty="0">
-                <a:solidFill>
-                  <a:schemeClr val="accent2">
-                    <a:lumMod val="75000"/>
-                  </a:schemeClr>
-                </a:solidFill>
-              </a:rPr>
-              <a:t> </a:t>
-            </a:r>
-            <a:r>
-              <a:rPr lang="en-US" dirty="0" smtClean="0">
-                <a:solidFill>
-                  <a:schemeClr val="accent2">
-                    <a:lumMod val="75000"/>
-                  </a:schemeClr>
-                </a:solidFill>
-              </a:rPr>
-              <a:t>       shared pointer: </a:t>
-            </a:r>
-            <a:r>
-              <a:rPr lang="en-US" dirty="0" smtClean="0">
-                <a:solidFill>
-                  <a:schemeClr val="accent2">
-                    <a:lumMod val="75000"/>
-                  </a:schemeClr>
-                </a:solidFill>
-              </a:rPr>
-              <a:t>d0)</a:t>
-            </a:r>
-            <a:endParaRPr lang="en-US" dirty="0" smtClean="0">
+            <a:endParaRPr lang="en-US" sz="1400" dirty="0" smtClean="0">
               <a:solidFill>
                 <a:schemeClr val="accent2">
                   <a:lumMod val="75000"/>
@@ -14854,80 +15273,90 @@
               </a:solidFill>
             </a:endParaRPr>
           </a:p>
-        </p:txBody>
-      </p:sp>
-      <p:cxnSp>
-        <p:nvCxnSpPr>
-          <p:cNvPr id="12" name="Straight Arrow Connector 11"/>
-          <p:cNvCxnSpPr>
-            <a:stCxn id="4" idx="3"/>
-            <a:endCxn id="6" idx="1"/>
-          </p:cNvCxnSpPr>
-          <p:nvPr/>
-        </p:nvCxnSpPr>
-        <p:spPr>
-          <a:xfrm>
-            <a:off x="1865167" y="1238250"/>
-            <a:ext cx="796385" cy="0"/>
-          </a:xfrm>
-          <a:prstGeom prst="straightConnector1">
-            <a:avLst/>
-          </a:prstGeom>
-          <a:ln w="15875">
-            <a:tailEnd type="triangle"/>
-          </a:ln>
-        </p:spPr>
-        <p:style>
-          <a:lnRef idx="1">
-            <a:schemeClr val="accent1"/>
-          </a:lnRef>
-          <a:fillRef idx="0">
-            <a:schemeClr val="accent1"/>
-          </a:fillRef>
-          <a:effectRef idx="0">
-            <a:schemeClr val="accent1"/>
-          </a:effectRef>
-          <a:fontRef idx="minor">
-            <a:schemeClr val="tx1"/>
-          </a:fontRef>
-        </p:style>
-      </p:cxnSp>
-      <p:sp>
-        <p:nvSpPr>
-          <p:cNvPr id="15" name="TextBox 14"/>
-          <p:cNvSpPr txBox="1"/>
-          <p:nvPr/>
-        </p:nvSpPr>
-        <p:spPr>
-          <a:xfrm>
-            <a:off x="1865167" y="876300"/>
-            <a:ext cx="781050" cy="369332"/>
-          </a:xfrm>
-          <a:prstGeom prst="rect">
-            <a:avLst/>
-          </a:prstGeom>
-          <a:noFill/>
-        </p:spPr>
-        <p:txBody>
-          <a:bodyPr wrap="square" rtlCol="0">
-            <a:spAutoFit/>
-          </a:bodyPr>
-          <a:lstStyle/>
-          <a:p>
+          <a:p>
+            <a:r>
+              <a:rPr lang="en-US" sz="1400" dirty="0">
+                <a:solidFill>
+                  <a:schemeClr val="accent2">
+                    <a:lumMod val="75000"/>
+                  </a:schemeClr>
+                </a:solidFill>
+              </a:rPr>
+              <a:t> </a:t>
+            </a:r>
+            <a:r>
+              <a:rPr lang="en-US" sz="1400" dirty="0" smtClean="0">
+                <a:solidFill>
+                  <a:schemeClr val="accent2">
+                    <a:lumMod val="75000"/>
+                  </a:schemeClr>
+                </a:solidFill>
+              </a:rPr>
+              <a:t>       shared pointer: </a:t>
+            </a:r>
+            <a:r>
+              <a:rPr lang="en-US" sz="1400" dirty="0" smtClean="0">
+                <a:solidFill>
+                  <a:schemeClr val="accent2">
+                    <a:lumMod val="75000"/>
+                  </a:schemeClr>
+                </a:solidFill>
+              </a:rPr>
+              <a:t>maturity</a:t>
+            </a:r>
+            <a:endParaRPr lang="en-US" sz="1400" dirty="0" smtClean="0">
+              <a:solidFill>
+                <a:schemeClr val="accent2">
+                  <a:lumMod val="75000"/>
+                </a:schemeClr>
+              </a:solidFill>
+            </a:endParaRPr>
+          </a:p>
+          <a:p>
+            <a:r>
+              <a:rPr lang="en-US" sz="1400" dirty="0">
+                <a:solidFill>
+                  <a:schemeClr val="accent2">
+                    <a:lumMod val="75000"/>
+                  </a:schemeClr>
+                </a:solidFill>
+              </a:rPr>
+              <a:t> </a:t>
+            </a:r>
+            <a:r>
+              <a:rPr lang="en-US" sz="1400" dirty="0" smtClean="0">
+                <a:solidFill>
+                  <a:schemeClr val="accent2">
+                    <a:lumMod val="75000"/>
+                  </a:schemeClr>
+                </a:solidFill>
+              </a:rPr>
+              <a:t>       shared pointer: </a:t>
+            </a:r>
+            <a:r>
+              <a:rPr lang="en-US" sz="1400" dirty="0" smtClean="0">
+                <a:solidFill>
+                  <a:schemeClr val="accent2">
+                    <a:lumMod val="75000"/>
+                  </a:schemeClr>
+                </a:solidFill>
+              </a:rPr>
+              <a:t>info</a:t>
+            </a:r>
             <a:r>
               <a:rPr lang="en-US" dirty="0" smtClean="0">
                 <a:solidFill>
-                  <a:schemeClr val="accent1">
-                    <a:lumMod val="50000"/>
+                  <a:schemeClr val="accent2">
+                    <a:lumMod val="75000"/>
                   </a:schemeClr>
                 </a:solidFill>
               </a:rPr>
-              <a:t>new()</a:t>
-            </a:r>
-            <a:endParaRPr lang="en-US" dirty="0">
+              <a:t>)</a:t>
+            </a:r>
+            <a:endParaRPr lang="en-US" dirty="0" smtClean="0">
               <a:solidFill>
-                <a:schemeClr val="accent1">
-                  <a:lumMod val="50000"/>
+                <a:schemeClr val="accent2">
+                  <a:lumMod val="75000"/>
                 </a:schemeClr>
               </a:solidFill>
             </a:endParaRPr>
@@ -15181,41 +15610,6 @@
                 </a:solidFill>
               </a:rPr>
               <a:t>evaluate(x)</a:t>
-            </a:r>
-          </a:p>
-        </p:txBody>
-      </p:sp>
-      <p:sp>
-        <p:nvSpPr>
-          <p:cNvPr id="24" name="TextBox 23"/>
-          <p:cNvSpPr txBox="1"/>
-          <p:nvPr/>
-        </p:nvSpPr>
-        <p:spPr>
-          <a:xfrm>
-            <a:off x="315545" y="3583279"/>
-            <a:ext cx="2133600" cy="369332"/>
-          </a:xfrm>
-          <a:prstGeom prst="rect">
-            <a:avLst/>
-          </a:prstGeom>
-          <a:noFill/>
-        </p:spPr>
-        <p:txBody>
-          <a:bodyPr wrap="square" rtlCol="0">
-            <a:spAutoFit/>
-          </a:bodyPr>
-          <a:lstStyle/>
-          <a:p>
-            <a:r>
-              <a:rPr lang="en-US" dirty="0" smtClean="0">
-                <a:solidFill>
-                  <a:schemeClr val="accent2">
-                    <a:lumMod val="75000"/>
-                  </a:schemeClr>
-                </a:solidFill>
-              </a:rPr>
-              <a:t>shared pointer: lm0</a:t>
             </a:r>
           </a:p>
         </p:txBody>
@@ -15774,8 +16168,15 @@
                   </a:schemeClr>
                 </a:solidFill>
               </a:rPr>
-              <a:t>d0</a:t>
-            </a:r>
+              <a:t>info</a:t>
+            </a:r>
+            <a:endParaRPr lang="en-US" dirty="0" smtClean="0">
+              <a:solidFill>
+                <a:schemeClr val="accent2">
+                  <a:lumMod val="75000"/>
+                </a:schemeClr>
+              </a:solidFill>
+            </a:endParaRPr>
           </a:p>
         </p:txBody>
       </p:sp>
@@ -16026,11 +16427,7 @@
             </a:r>
             <a:r>
               <a:rPr lang="en-US" dirty="0" smtClean="0"/>
-              <a:t>::</a:t>
-            </a:r>
-            <a:r>
-              <a:rPr lang="en-US" dirty="0" smtClean="0"/>
-              <a:t>Information </a:t>
+              <a:t>::Information </a:t>
             </a:r>
             <a:endParaRPr lang="en-US" dirty="0"/>
           </a:p>
@@ -16388,101 +16785,6 @@
                 </a:solidFill>
               </a:rPr>
               <a:t>this-&gt;maturity-&gt;evaluate(age)</a:t>
-            </a:r>
-          </a:p>
-        </p:txBody>
-      </p:sp>
-      <p:cxnSp>
-        <p:nvCxnSpPr>
-          <p:cNvPr id="40" name="Elbow Connector 39"/>
-          <p:cNvCxnSpPr>
-            <a:endCxn id="51" idx="2"/>
-          </p:cNvCxnSpPr>
-          <p:nvPr/>
-        </p:nvCxnSpPr>
-        <p:spPr>
-          <a:xfrm flipV="1">
-            <a:off x="5248817" y="2710982"/>
-            <a:ext cx="4209132" cy="718019"/>
-          </a:xfrm>
-          <a:prstGeom prst="bentConnector2">
-            <a:avLst/>
-          </a:prstGeom>
-          <a:ln w="15875">
-            <a:solidFill>
-              <a:schemeClr val="accent2">
-                <a:lumMod val="75000"/>
-              </a:schemeClr>
-            </a:solidFill>
-            <a:tailEnd type="triangle"/>
-          </a:ln>
-        </p:spPr>
-        <p:style>
-          <a:lnRef idx="1">
-            <a:schemeClr val="dk1"/>
-          </a:lnRef>
-          <a:fillRef idx="0">
-            <a:schemeClr val="dk1"/>
-          </a:fillRef>
-          <a:effectRef idx="0">
-            <a:schemeClr val="dk1"/>
-          </a:effectRef>
-          <a:fontRef idx="minor">
-            <a:schemeClr val="tx1"/>
-          </a:fontRef>
-        </p:style>
-      </p:cxnSp>
-      <p:sp>
-        <p:nvSpPr>
-          <p:cNvPr id="41" name="TextBox 40"/>
-          <p:cNvSpPr txBox="1"/>
-          <p:nvPr/>
-        </p:nvSpPr>
-        <p:spPr>
-          <a:xfrm>
-            <a:off x="5456337" y="3070160"/>
-            <a:ext cx="3813464" cy="369332"/>
-          </a:xfrm>
-          <a:prstGeom prst="rect">
-            <a:avLst/>
-          </a:prstGeom>
-          <a:noFill/>
-        </p:spPr>
-        <p:txBody>
-          <a:bodyPr wrap="square" rtlCol="0">
-            <a:spAutoFit/>
-          </a:bodyPr>
-          <a:lstStyle/>
-          <a:p>
-            <a:r>
-              <a:rPr lang="en-US" dirty="0">
-                <a:solidFill>
-                  <a:schemeClr val="accent2">
-                    <a:lumMod val="75000"/>
-                  </a:schemeClr>
-                </a:solidFill>
-              </a:rPr>
-              <a:t>d0-&gt;</a:t>
-            </a:r>
-            <a:r>
-              <a:rPr lang="en-US" dirty="0" err="1">
-                <a:solidFill>
-                  <a:schemeClr val="accent2">
-                    <a:lumMod val="75000"/>
-                  </a:schemeClr>
-                </a:solidFill>
-              </a:rPr>
-              <a:t>maturity_models</a:t>
-            </a:r>
-            <a:r>
-              <a:rPr lang="en-US" dirty="0">
-                <a:solidFill>
-                  <a:schemeClr val="accent2">
-                    <a:lumMod val="75000"/>
-                  </a:schemeClr>
-                </a:solidFill>
-              </a:rPr>
-              <a:t>[lm0-&gt;id] = lm0;</a:t>
             </a:r>
           </a:p>
         </p:txBody>
@@ -16638,6 +16940,404 @@
           <a:p>
             <a:pPr algn="ctr"/>
             <a:endParaRPr lang="en-US"/>
+          </a:p>
+        </p:txBody>
+      </p:sp>
+      <p:sp>
+        <p:nvSpPr>
+          <p:cNvPr id="46" name="Rectangle 45"/>
+          <p:cNvSpPr/>
+          <p:nvPr/>
+        </p:nvSpPr>
+        <p:spPr>
+          <a:xfrm>
+            <a:off x="245917" y="723900"/>
+            <a:ext cx="1220045" cy="1028700"/>
+          </a:xfrm>
+          <a:prstGeom prst="rect">
+            <a:avLst/>
+          </a:prstGeom>
+          <a:solidFill>
+            <a:schemeClr val="accent1">
+              <a:lumMod val="20000"/>
+              <a:lumOff val="80000"/>
+            </a:schemeClr>
+          </a:solidFill>
+          <a:ln>
+            <a:solidFill>
+              <a:schemeClr val="accent1">
+                <a:lumMod val="50000"/>
+              </a:schemeClr>
+            </a:solidFill>
+          </a:ln>
+        </p:spPr>
+        <p:style>
+          <a:lnRef idx="2">
+            <a:schemeClr val="accent1">
+              <a:shade val="50000"/>
+            </a:schemeClr>
+          </a:lnRef>
+          <a:fillRef idx="1">
+            <a:schemeClr val="accent1"/>
+          </a:fillRef>
+          <a:effectRef idx="0">
+            <a:schemeClr val="accent1"/>
+          </a:effectRef>
+          <a:fontRef idx="minor">
+            <a:schemeClr val="lt1"/>
+          </a:fontRef>
+        </p:style>
+        <p:txBody>
+          <a:bodyPr rtlCol="0" anchor="ctr"/>
+          <a:lstStyle/>
+          <a:p>
+            <a:r>
+              <a:rPr lang="en-US" b="1" dirty="0" smtClean="0">
+                <a:solidFill>
+                  <a:schemeClr val="accent1">
+                    <a:lumMod val="50000"/>
+                  </a:schemeClr>
+                </a:solidFill>
+              </a:rPr>
+              <a:t>maturity</a:t>
+            </a:r>
+            <a:endParaRPr lang="en-US" b="1" dirty="0" smtClean="0">
+              <a:solidFill>
+                <a:schemeClr val="accent1">
+                  <a:lumMod val="50000"/>
+                </a:schemeClr>
+              </a:solidFill>
+            </a:endParaRPr>
+          </a:p>
+          <a:p>
+            <a:pPr marL="285750" indent="-285750">
+              <a:buFont typeface="Arial" panose="020B0604020202020204" pitchFamily="34" charset="0"/>
+              <a:buChar char="•"/>
+            </a:pPr>
+            <a:r>
+              <a:rPr lang="en-US" dirty="0" smtClean="0">
+                <a:solidFill>
+                  <a:schemeClr val="accent1">
+                    <a:lumMod val="50000"/>
+                  </a:schemeClr>
+                </a:solidFill>
+              </a:rPr>
+              <a:t>median</a:t>
+            </a:r>
+          </a:p>
+          <a:p>
+            <a:pPr marL="285750" indent="-285750">
+              <a:buFont typeface="Arial" panose="020B0604020202020204" pitchFamily="34" charset="0"/>
+              <a:buChar char="•"/>
+            </a:pPr>
+            <a:r>
+              <a:rPr lang="en-US" dirty="0" smtClean="0">
+                <a:solidFill>
+                  <a:schemeClr val="accent1">
+                    <a:lumMod val="50000"/>
+                  </a:schemeClr>
+                </a:solidFill>
+              </a:rPr>
+              <a:t>slope</a:t>
+            </a:r>
+            <a:endParaRPr lang="en-US" dirty="0">
+              <a:solidFill>
+                <a:schemeClr val="accent1">
+                  <a:lumMod val="50000"/>
+                </a:schemeClr>
+              </a:solidFill>
+            </a:endParaRPr>
+          </a:p>
+        </p:txBody>
+      </p:sp>
+      <p:cxnSp>
+        <p:nvCxnSpPr>
+          <p:cNvPr id="47" name="Straight Arrow Connector 46"/>
+          <p:cNvCxnSpPr>
+            <a:stCxn id="46" idx="3"/>
+          </p:cNvCxnSpPr>
+          <p:nvPr/>
+        </p:nvCxnSpPr>
+        <p:spPr>
+          <a:xfrm>
+            <a:off x="1465962" y="1238250"/>
+            <a:ext cx="1195589" cy="0"/>
+          </a:xfrm>
+          <a:prstGeom prst="straightConnector1">
+            <a:avLst/>
+          </a:prstGeom>
+          <a:ln w="15875">
+            <a:tailEnd type="triangle"/>
+          </a:ln>
+        </p:spPr>
+        <p:style>
+          <a:lnRef idx="1">
+            <a:schemeClr val="accent1"/>
+          </a:lnRef>
+          <a:fillRef idx="0">
+            <a:schemeClr val="accent1"/>
+          </a:fillRef>
+          <a:effectRef idx="0">
+            <a:schemeClr val="accent1"/>
+          </a:effectRef>
+          <a:fontRef idx="minor">
+            <a:schemeClr val="tx1"/>
+          </a:fontRef>
+        </p:style>
+      </p:cxnSp>
+      <p:sp>
+        <p:nvSpPr>
+          <p:cNvPr id="49" name="TextBox 48"/>
+          <p:cNvSpPr txBox="1"/>
+          <p:nvPr/>
+        </p:nvSpPr>
+        <p:spPr>
+          <a:xfrm>
+            <a:off x="1405580" y="944268"/>
+            <a:ext cx="1443753" cy="307777"/>
+          </a:xfrm>
+          <a:prstGeom prst="rect">
+            <a:avLst/>
+          </a:prstGeom>
+          <a:noFill/>
+        </p:spPr>
+        <p:txBody>
+          <a:bodyPr wrap="square" rtlCol="0">
+            <a:spAutoFit/>
+          </a:bodyPr>
+          <a:lstStyle/>
+          <a:p>
+            <a:r>
+              <a:rPr lang="en-US" sz="1400" dirty="0">
+                <a:solidFill>
+                  <a:schemeClr val="accent1">
+                    <a:lumMod val="50000"/>
+                  </a:schemeClr>
+                </a:solidFill>
+              </a:rPr>
+              <a:t>m</a:t>
+            </a:r>
+            <a:r>
+              <a:rPr lang="en-US" sz="1400" dirty="0" smtClean="0">
+                <a:solidFill>
+                  <a:schemeClr val="accent1">
+                    <a:lumMod val="50000"/>
+                  </a:schemeClr>
+                </a:solidFill>
+              </a:rPr>
+              <a:t>ethods::new</a:t>
+            </a:r>
+            <a:r>
+              <a:rPr lang="en-US" sz="1400" dirty="0" smtClean="0">
+                <a:solidFill>
+                  <a:schemeClr val="accent1">
+                    <a:lumMod val="50000"/>
+                  </a:schemeClr>
+                </a:solidFill>
+              </a:rPr>
+              <a:t>()</a:t>
+            </a:r>
+            <a:endParaRPr lang="en-US" sz="1400" dirty="0">
+              <a:solidFill>
+                <a:schemeClr val="accent1">
+                  <a:lumMod val="50000"/>
+                </a:schemeClr>
+              </a:solidFill>
+            </a:endParaRPr>
+          </a:p>
+        </p:txBody>
+      </p:sp>
+      <p:sp>
+        <p:nvSpPr>
+          <p:cNvPr id="52" name="TextBox 51"/>
+          <p:cNvSpPr txBox="1"/>
+          <p:nvPr/>
+        </p:nvSpPr>
+        <p:spPr>
+          <a:xfrm>
+            <a:off x="630323" y="3471935"/>
+            <a:ext cx="1792926" cy="646331"/>
+          </a:xfrm>
+          <a:prstGeom prst="rect">
+            <a:avLst/>
+          </a:prstGeom>
+          <a:noFill/>
+        </p:spPr>
+        <p:txBody>
+          <a:bodyPr wrap="square" rtlCol="0">
+            <a:spAutoFit/>
+          </a:bodyPr>
+          <a:lstStyle/>
+          <a:p>
+            <a:r>
+              <a:rPr lang="en-US" dirty="0" smtClean="0">
+                <a:solidFill>
+                  <a:schemeClr val="accent2">
+                    <a:lumMod val="75000"/>
+                  </a:schemeClr>
+                </a:solidFill>
+              </a:rPr>
+              <a:t>shared pointer: </a:t>
+            </a:r>
+            <a:r>
+              <a:rPr lang="en-US" dirty="0" smtClean="0">
+                <a:solidFill>
+                  <a:schemeClr val="accent2">
+                    <a:lumMod val="75000"/>
+                  </a:schemeClr>
+                </a:solidFill>
+              </a:rPr>
+              <a:t>maturity</a:t>
+            </a:r>
+            <a:endParaRPr lang="en-US" dirty="0" smtClean="0">
+              <a:solidFill>
+                <a:schemeClr val="accent2">
+                  <a:lumMod val="75000"/>
+                </a:schemeClr>
+              </a:solidFill>
+            </a:endParaRPr>
+          </a:p>
+        </p:txBody>
+      </p:sp>
+      <p:cxnSp>
+        <p:nvCxnSpPr>
+          <p:cNvPr id="53" name="Elbow Connector 52"/>
+          <p:cNvCxnSpPr/>
+          <p:nvPr/>
+        </p:nvCxnSpPr>
+        <p:spPr>
+          <a:xfrm flipV="1">
+            <a:off x="5282986" y="2710982"/>
+            <a:ext cx="4300961" cy="718018"/>
+          </a:xfrm>
+          <a:prstGeom prst="bentConnector3">
+            <a:avLst>
+              <a:gd name="adj1" fmla="val 99942"/>
+            </a:avLst>
+          </a:prstGeom>
+          <a:ln w="15875">
+            <a:solidFill>
+              <a:schemeClr val="accent2">
+                <a:lumMod val="75000"/>
+              </a:schemeClr>
+            </a:solidFill>
+            <a:tailEnd type="triangle"/>
+          </a:ln>
+        </p:spPr>
+        <p:style>
+          <a:lnRef idx="1">
+            <a:schemeClr val="dk1"/>
+          </a:lnRef>
+          <a:fillRef idx="0">
+            <a:schemeClr val="dk1"/>
+          </a:fillRef>
+          <a:effectRef idx="0">
+            <a:schemeClr val="dk1"/>
+          </a:effectRef>
+          <a:fontRef idx="minor">
+            <a:schemeClr val="tx1"/>
+          </a:fontRef>
+        </p:style>
+      </p:cxnSp>
+      <p:sp>
+        <p:nvSpPr>
+          <p:cNvPr id="55" name="TextBox 54"/>
+          <p:cNvSpPr txBox="1"/>
+          <p:nvPr/>
+        </p:nvSpPr>
+        <p:spPr>
+          <a:xfrm>
+            <a:off x="5365738" y="3070160"/>
+            <a:ext cx="4200955" cy="338554"/>
+          </a:xfrm>
+          <a:prstGeom prst="rect">
+            <a:avLst/>
+          </a:prstGeom>
+          <a:noFill/>
+        </p:spPr>
+        <p:txBody>
+          <a:bodyPr wrap="square" rtlCol="0">
+            <a:spAutoFit/>
+          </a:bodyPr>
+          <a:lstStyle/>
+          <a:p>
+            <a:r>
+              <a:rPr lang="en-US" sz="1600" dirty="0" smtClean="0">
+                <a:solidFill>
+                  <a:schemeClr val="accent2">
+                    <a:lumMod val="75000"/>
+                  </a:schemeClr>
+                </a:solidFill>
+              </a:rPr>
+              <a:t>info</a:t>
+            </a:r>
+            <a:r>
+              <a:rPr lang="en-US" sz="1600" dirty="0" smtClean="0">
+                <a:solidFill>
+                  <a:schemeClr val="accent2">
+                    <a:lumMod val="75000"/>
+                  </a:schemeClr>
+                </a:solidFill>
+              </a:rPr>
+              <a:t>-&gt;</a:t>
+            </a:r>
+            <a:r>
+              <a:rPr lang="en-US" sz="1600" dirty="0" err="1" smtClean="0">
+                <a:solidFill>
+                  <a:schemeClr val="accent2">
+                    <a:lumMod val="75000"/>
+                  </a:schemeClr>
+                </a:solidFill>
+              </a:rPr>
+              <a:t>maturity_models</a:t>
+            </a:r>
+            <a:r>
+              <a:rPr lang="en-US" sz="1600" dirty="0" smtClean="0">
+                <a:solidFill>
+                  <a:schemeClr val="accent2">
+                    <a:lumMod val="75000"/>
+                  </a:schemeClr>
+                </a:solidFill>
+              </a:rPr>
+              <a:t>[maturity-</a:t>
+            </a:r>
+            <a:r>
+              <a:rPr lang="en-US" sz="1600" dirty="0">
+                <a:solidFill>
+                  <a:schemeClr val="accent2">
+                    <a:lumMod val="75000"/>
+                  </a:schemeClr>
+                </a:solidFill>
+              </a:rPr>
+              <a:t>&gt;id] = </a:t>
+            </a:r>
+            <a:r>
+              <a:rPr lang="en-US" sz="1600" dirty="0" smtClean="0">
+                <a:solidFill>
+                  <a:schemeClr val="accent2">
+                    <a:lumMod val="75000"/>
+                  </a:schemeClr>
+                </a:solidFill>
+              </a:rPr>
+              <a:t>maturity</a:t>
+            </a:r>
+            <a:r>
+              <a:rPr lang="en-US" sz="1600" dirty="0" smtClean="0">
+                <a:solidFill>
+                  <a:schemeClr val="accent2">
+                    <a:lumMod val="75000"/>
+                  </a:schemeClr>
+                </a:solidFill>
+              </a:rPr>
+              <a:t>;</a:t>
+            </a:r>
+            <a:endParaRPr lang="en-US" sz="1600" dirty="0">
+              <a:solidFill>
+                <a:schemeClr val="accent2">
+                  <a:lumMod val="75000"/>
+                </a:schemeClr>
+              </a:solidFill>
+            </a:endParaRPr>
           </a:p>
         </p:txBody>
       </p:sp>
